--- a/00-01_han-ai/training-materials/course04_jissen_doga.pptx
+++ b/00-01_han-ai/training-materials/course04_jissen_doga.pptx
@@ -4811,14 +4811,63 @@
           </a:bodyPr>
           <a:lstStyle/>
           <a:p>
-            <a:pPr algn="l"/>
             <a:r>
               <a:rPr sz="1300" b="0" i="0">
                 <a:solidFill>
                   <a:srgbClr val="059669"/>
                 </a:solidFill>
               </a:rPr>
-              <a:t>早く終わった方はセクション2に戻って2本目を作成してください</a:t>
+              <a:t>【クリップ編集・書き出し（〜40分）】</a:t>
+            </a:r>
+          </a:p>
+          <a:p>
+            <a:r>
+              <a:rPr sz="1300" b="0" i="0">
+                <a:solidFill>
+                  <a:srgbClr val="059669"/>
+                </a:solidFill>
+              </a:rPr>
+              <a:t>映像トリミング → テキスト（タイトル・社名）追加 → BGM追加</a:t>
+            </a:r>
+          </a:p>
+          <a:p>
+            <a:r>
+              <a:rPr sz="1300" b="0" i="0">
+                <a:solidFill>
+                  <a:srgbClr val="059669"/>
+                </a:solidFill>
+              </a:rPr>
+              <a:t>→ 右上の書き出しボタン → 品質1080p・MP4 → 保存（30秒なら1〜2分で完了）</a:t>
+            </a:r>
+          </a:p>
+          <a:p>
+            <a:r>
+              <a:rPr sz="1300" b="0" i="0">
+                <a:solidFill>
+                  <a:srgbClr val="059669"/>
+                </a:solidFill>
+              </a:rPr>
+              <a:t/>
+            </a:r>
+          </a:p>
+          <a:p>
+            <a:r>
+              <a:rPr sz="1300" b="0" i="0">
+                <a:solidFill>
+                  <a:srgbClr val="059669"/>
+                </a:solidFill>
+              </a:rPr>
+              <a:t>早く書き出しまで終わった方：</a:t>
+            </a:r>
+          </a:p>
+          <a:p>
+            <a:r>
+              <a:rPr sz="1300" b="0" i="0">
+                <a:solidFill>
+                  <a:srgbClr val="059669"/>
+                </a:solidFill>
+              </a:rPr>
+              <a:t>Seedanceに戻ってもう1本、テーマを変えて作ってみましょう</a:t>
             </a:r>
           </a:p>
         </p:txBody>
@@ -7841,7 +7890,7 @@
                   <a:srgbClr val="93C5FD"/>
                 </a:solidFill>
               </a:rPr>
-              <a:t>[デモ5分 + 実践10分]</a:t>
+              <a:t>[デモ5分 + 実践10分 + DL]</a:t>
             </a:r>
           </a:p>
         </p:txBody>
@@ -8148,7 +8197,137 @@
                   <a:srgbClr val="64748B"/>
                 </a:solidFill>
               </a:rPr>
-              <a:t>会社・お店の雰囲気紹介 ／ 商品・サービスのイメージ映像 ／ 季節のご挨拶 ／ 採用広報（職場の一日）</a:t>
+              <a:t>【クオリティ向上要素（スライド表示）】</a:t>
+            </a:r>
+          </a:p>
+          <a:p>
+            <a:r>
+              <a:rPr sz="1200">
+                <a:solidFill>
+                  <a:srgbClr val="64748B"/>
+                </a:solidFill>
+              </a:rPr>
+              <a:t>映像スタイル：シネマティック・ドキュメンタリー風・SNS動画風</a:t>
+            </a:r>
+          </a:p>
+          <a:p>
+            <a:r>
+              <a:rPr sz="1200">
+                <a:solidFill>
+                  <a:srgbClr val="64748B"/>
+                </a:solidFill>
+              </a:rPr>
+              <a:t>光の条件：朝日・夕日・柔らかい自然光・温かみのある室内照明</a:t>
+            </a:r>
+          </a:p>
+          <a:p>
+            <a:r>
+              <a:rPr sz="1200">
+                <a:solidFill>
+                  <a:srgbClr val="64748B"/>
+                </a:solidFill>
+              </a:rPr>
+              <a:t>カメラワーク：ゆっくりパン・ズームイン・固定・スローモーション</a:t>
+            </a:r>
+          </a:p>
+          <a:p>
+            <a:r>
+              <a:rPr sz="1200">
+                <a:solidFill>
+                  <a:srgbClr val="64748B"/>
+                </a:solidFill>
+              </a:rPr>
+              <a:t>被写体の動き：静かに佇む・丁寧に作業している・歩いている</a:t>
+            </a:r>
+          </a:p>
+          <a:p>
+            <a:r>
+              <a:rPr sz="1200">
+                <a:solidFill>
+                  <a:srgbClr val="64748B"/>
+                </a:solidFill>
+              </a:rPr>
+              <a:t/>
+            </a:r>
+          </a:p>
+          <a:p>
+            <a:r>
+              <a:rPr sz="1200">
+                <a:solidFill>
+                  <a:srgbClr val="64748B"/>
+                </a:solidFill>
+              </a:rPr>
+              <a:t>【自由実践テーマ例（各自で試してください）】</a:t>
+            </a:r>
+          </a:p>
+          <a:p>
+            <a:r>
+              <a:rPr sz="1200">
+                <a:solidFill>
+                  <a:srgbClr val="64748B"/>
+                </a:solidFill>
+              </a:rPr>
+              <a:t>工房職人：「木材を丁寧に加工する職人の手元、クローズアップ、自然光、落ち着いた色調」</a:t>
+            </a:r>
+          </a:p>
+          <a:p>
+            <a:r>
+              <a:rPr sz="1200">
+                <a:solidFill>
+                  <a:srgbClr val="64748B"/>
+                </a:solidFill>
+              </a:rPr>
+              <a:t>商品クローズアップ：「手作りの革財布が木のテーブルの上、高級感、ゆっくりズームイン、温かい照明」</a:t>
+            </a:r>
+          </a:p>
+          <a:p>
+            <a:r>
+              <a:rPr sz="1200">
+                <a:solidFill>
+                  <a:srgbClr val="64748B"/>
+                </a:solidFill>
+              </a:rPr>
+              <a:t>夏の青空：「夏の青空と白い雲が広がる爽やかな風景、スローモーション、自然光」</a:t>
+            </a:r>
+          </a:p>
+          <a:p>
+            <a:r>
+              <a:rPr sz="1200">
+                <a:solidFill>
+                  <a:srgbClr val="64748B"/>
+                </a:solidFill>
+              </a:rPr>
+              <a:t>オフィス打合せ：「スタッフが笑顔で打合せ、活気とチームワーク、ドキュメンタリー風、自然光」</a:t>
+            </a:r>
+          </a:p>
+          <a:p>
+            <a:r>
+              <a:rPr sz="1200">
+                <a:solidFill>
+                  <a:srgbClr val="64748B"/>
+                </a:solidFill>
+              </a:rPr>
+              <a:t/>
+            </a:r>
+          </a:p>
+          <a:p>
+            <a:r>
+              <a:rPr sz="1200">
+                <a:solidFill>
+                  <a:srgbClr val="64748B"/>
+                </a:solidFill>
+              </a:rPr>
+              <a:t>【映像DL手順】 生成された映像を選択 → ダウンロードボタン → MP4で保存</a:t>
+            </a:r>
+          </a:p>
+          <a:p>
+            <a:r>
+              <a:rPr sz="1200">
+                <a:solidFill>
+                  <a:srgbClr val="64748B"/>
+                </a:solidFill>
+              </a:rPr>
+              <a:t>※ CapCut → 新規プロジェクト → この映像を読み込んで次のセクションへ</a:t>
             </a:r>
           </a:p>
         </p:txBody>
@@ -8958,7 +9137,7 @@
                   <a:srgbClr val="1E293B"/>
                 </a:solidFill>
               </a:rPr>
-              <a:t>台本ひな型：「[テーマ]の紹介動画のナレーション原稿を1分で読める長さで作ってください」</a:t>
+              <a:t>台本ひな型：「[テーマ]の紹介動画のナレーション原稿を30秒で読める長さ（130字程度）で作ってください」</a:t>
             </a:r>
           </a:p>
         </p:txBody>

--- a/00-01_han-ai/training-materials/course04_jissen_doga.pptx
+++ b/00-01_han-ai/training-materials/course04_jissen_doga.pptx
@@ -3099,7 +3099,7 @@
     <p:bg>
       <p:bgPr>
         <a:solidFill>
-          <a:srgbClr val="1E40AF"/>
+          <a:srgbClr val="1C1C1C"/>
         </a:solidFill>
         <a:effectLst/>
       </p:bgPr>
@@ -3180,7 +3180,7 @@
             <a:r>
               <a:rPr sz="1300" b="0" i="0">
                 <a:solidFill>
-                  <a:srgbClr val="93C5FD"/>
+                  <a:srgbClr val="DA7756"/>
                 </a:solidFill>
               </a:rPr>
               <a:t>ざつね屋</a:t>
@@ -3214,7 +3214,7 @@
             <a:r>
               <a:rPr sz="1800" b="0" i="0">
                 <a:solidFill>
-                  <a:srgbClr val="BFDBFE"/>
+                  <a:srgbClr val="B8A99A"/>
                 </a:solidFill>
               </a:rPr>
               <a:t>コース ④</a:t>
@@ -3282,7 +3282,7 @@
             <a:r>
               <a:rPr sz="1600" b="0" i="0">
                 <a:solidFill>
-                  <a:srgbClr val="BFDBFE"/>
+                  <a:srgbClr val="B8A99A"/>
                 </a:solidFill>
               </a:rPr>
               <a:t>複数のAIが連携して1本の動画が完成する体験 120分</a:t>
@@ -3316,7 +3316,7 @@
             <a:r>
               <a:rPr sz="1300" b="0" i="0">
                 <a:solidFill>
-                  <a:srgbClr val="93C5FD"/>
+                  <a:srgbClr val="DA7756"/>
                 </a:solidFill>
               </a:rPr>
               <a:t>ツール：CapCut 無料版 ＋ Gemini（台本）　｜　成果物：ショート動画1本</a:t>
@@ -3338,7 +3338,7 @@
     <p:bg>
       <p:bgPr>
         <a:solidFill>
-          <a:srgbClr val="1E40AF"/>
+          <a:srgbClr val="1C1C1C"/>
         </a:solidFill>
         <a:effectLst/>
       </p:bgPr>
@@ -3487,7 +3487,7 @@
             <a:r>
               <a:rPr sz="1400" b="0" i="0">
                 <a:solidFill>
-                  <a:srgbClr val="93C5FD"/>
+                  <a:srgbClr val="DA7756"/>
                 </a:solidFill>
               </a:rPr>
               <a:t>[10分]</a:t>
@@ -3521,7 +3521,7 @@
             <a:r>
               <a:rPr sz="1500" b="0" i="0">
                 <a:solidFill>
-                  <a:srgbClr val="BFDBFE"/>
+                  <a:srgbClr val="B8A99A"/>
                 </a:solidFill>
               </a:rPr>
               <a:t>ナレーション音声から字幕を自動生成</a:t>
@@ -3540,6 +3540,14 @@
 <file path=ppt/slides/slide11.xml><?xml version="1.0" encoding="utf-8"?>
 <p:sld xmlns:a="http://schemas.openxmlformats.org/drawingml/2006/main" xmlns:p="http://schemas.openxmlformats.org/presentationml/2006/main" xmlns:r="http://schemas.openxmlformats.org/officeDocument/2006/relationships">
   <p:cSld>
+    <p:bg>
+      <p:bgPr>
+        <a:solidFill>
+          <a:srgbClr val="1C1C1C"/>
+        </a:solidFill>
+        <a:effectLst/>
+      </p:bgPr>
+    </p:bg>
     <p:spTree>
       <p:nvGrpSpPr>
         <p:cNvPr id="1" name=""/>
@@ -3562,7 +3570,7 @@
             <a:avLst/>
           </a:prstGeom>
           <a:solidFill>
-            <a:srgbClr val="1E40AF"/>
+            <a:srgbClr val="252525"/>
           </a:solidFill>
           <a:ln>
             <a:noFill/>
@@ -3650,7 +3658,7 @@
             <a:r>
               <a:rPr sz="1200" b="0" i="0">
                 <a:solidFill>
-                  <a:srgbClr val="93C5FD"/>
+                  <a:srgbClr val="DA7756"/>
                 </a:solidFill>
               </a:rPr>
               <a:t>[10分]</a:t>
@@ -3699,7 +3707,7 @@
                   </a:txBody>
                   <a:tcPr>
                     <a:solidFill>
-                      <a:srgbClr val="1E40AF"/>
+                      <a:srgbClr val="1C1C1C"/>
                     </a:solidFill>
                   </a:tcPr>
                 </a:tc>
@@ -3721,7 +3729,7 @@
                   </a:txBody>
                   <a:tcPr>
                     <a:solidFill>
-                      <a:srgbClr val="1E40AF"/>
+                      <a:srgbClr val="1C1C1C"/>
                     </a:solidFill>
                   </a:tcPr>
                 </a:tc>
@@ -3736,7 +3744,7 @@
                       <a:r>
                         <a:rPr sz="1100">
                           <a:solidFill>
-                            <a:srgbClr val="1E293B"/>
+                            <a:srgbClr val="EEEEEE"/>
                           </a:solidFill>
                         </a:rPr>
                         <a:t>1 字幕メニューを開く</a:t>
@@ -3754,7 +3762,7 @@
                       <a:r>
                         <a:rPr sz="1100">
                           <a:solidFill>
-                            <a:srgbClr val="1E293B"/>
+                            <a:srgbClr val="EEEEEE"/>
                           </a:solidFill>
                         </a:rPr>
                         <a:t>CapCut「字幕」→「自動字幕生成」を選択</a:t>
@@ -3774,7 +3782,7 @@
                       <a:r>
                         <a:rPr sz="1100">
                           <a:solidFill>
-                            <a:srgbClr val="1E293B"/>
+                            <a:srgbClr val="EEEEEE"/>
                           </a:solidFill>
                         </a:rPr>
                         <a:t>2 言語を設定</a:t>
@@ -3796,7 +3804,7 @@
                       <a:r>
                         <a:rPr sz="1100">
                           <a:solidFill>
-                            <a:srgbClr val="1E293B"/>
+                            <a:srgbClr val="EEEEEE"/>
                           </a:solidFill>
                         </a:rPr>
                         <a:t>日本語を選択 → 「生成」をクリック（少し時間がかかる）</a:t>
@@ -3820,7 +3828,7 @@
                       <a:r>
                         <a:rPr sz="1100">
                           <a:solidFill>
-                            <a:srgbClr val="1E293B"/>
+                            <a:srgbClr val="EEEEEE"/>
                           </a:solidFill>
                         </a:rPr>
                         <a:t>3 結果を確認</a:t>
@@ -3838,7 +3846,7 @@
                       <a:r>
                         <a:rPr sz="1100">
                           <a:solidFill>
-                            <a:srgbClr val="1E293B"/>
+                            <a:srgbClr val="EEEEEE"/>
                           </a:solidFill>
                         </a:rPr>
                         <a:t>ナレーション音声が正しく文字に変換されているか確認</a:t>
@@ -3858,7 +3866,7 @@
                       <a:r>
                         <a:rPr sz="1100">
                           <a:solidFill>
-                            <a:srgbClr val="1E293B"/>
+                            <a:srgbClr val="EEEEEE"/>
                           </a:solidFill>
                         </a:rPr>
                         <a:t>4 修正は次のセクションで</a:t>
@@ -3880,7 +3888,7 @@
                       <a:r>
                         <a:rPr sz="1100">
                           <a:solidFill>
-                            <a:srgbClr val="1E293B"/>
+                            <a:srgbClr val="EEEEEE"/>
                           </a:solidFill>
                         </a:rPr>
                         <a:t>ここでは生成結果の確認まで。修正はセクション5（基本編集）で行う</a:t>
@@ -4023,7 +4031,7 @@
     <p:bg>
       <p:bgPr>
         <a:solidFill>
-          <a:srgbClr val="1E40AF"/>
+          <a:srgbClr val="1C1C1C"/>
         </a:solidFill>
         <a:effectLst/>
       </p:bgPr>
@@ -4061,7 +4069,7 @@
             <a:r>
               <a:rPr sz="4000" b="1" i="0">
                 <a:solidFill>
-                  <a:srgbClr val="BFDBFE"/>
+                  <a:srgbClr val="B8A99A"/>
                 </a:solidFill>
               </a:rPr>
               <a:t>- 休憩 -</a:t>
@@ -4095,7 +4103,7 @@
             <a:r>
               <a:rPr sz="1800" b="0" i="0">
                 <a:solidFill>
-                  <a:srgbClr val="93C5FD"/>
+                  <a:srgbClr val="DA7756"/>
                 </a:solidFill>
               </a:rPr>
               <a:t>5〜10分</a:t>
@@ -4117,7 +4125,7 @@
     <p:bg>
       <p:bgPr>
         <a:solidFill>
-          <a:srgbClr val="1E40AF"/>
+          <a:srgbClr val="1C1C1C"/>
         </a:solidFill>
         <a:effectLst/>
       </p:bgPr>
@@ -4266,7 +4274,7 @@
             <a:r>
               <a:rPr sz="1400" b="0" i="0">
                 <a:solidFill>
-                  <a:srgbClr val="93C5FD"/>
+                  <a:srgbClr val="DA7756"/>
                 </a:solidFill>
               </a:rPr>
               <a:t>[50分]</a:t>
@@ -4300,7 +4308,7 @@
             <a:r>
               <a:rPr sz="1500" b="0" i="0">
                 <a:solidFill>
-                  <a:srgbClr val="BFDBFE"/>
+                  <a:srgbClr val="B8A99A"/>
                 </a:solidFill>
               </a:rPr>
               <a:t>AIの素材を人間が磨いて完成品にする</a:t>
@@ -4319,6 +4327,14 @@
 <file path=ppt/slides/slide14.xml><?xml version="1.0" encoding="utf-8"?>
 <p:sld xmlns:a="http://schemas.openxmlformats.org/drawingml/2006/main" xmlns:p="http://schemas.openxmlformats.org/presentationml/2006/main" xmlns:r="http://schemas.openxmlformats.org/officeDocument/2006/relationships">
   <p:cSld>
+    <p:bg>
+      <p:bgPr>
+        <a:solidFill>
+          <a:srgbClr val="1C1C1C"/>
+        </a:solidFill>
+        <a:effectLst/>
+      </p:bgPr>
+    </p:bg>
     <p:spTree>
       <p:nvGrpSpPr>
         <p:cNvPr id="1" name=""/>
@@ -4341,7 +4357,7 @@
             <a:avLst/>
           </a:prstGeom>
           <a:solidFill>
-            <a:srgbClr val="1E40AF"/>
+            <a:srgbClr val="252525"/>
           </a:solidFill>
           <a:ln>
             <a:noFill/>
@@ -4429,7 +4445,7 @@
             <a:r>
               <a:rPr sz="1200" b="0" i="0">
                 <a:solidFill>
-                  <a:srgbClr val="93C5FD"/>
+                  <a:srgbClr val="DA7756"/>
                 </a:solidFill>
               </a:rPr>
               <a:t>[50分]</a:t>
@@ -4479,7 +4495,7 @@
                   </a:txBody>
                   <a:tcPr>
                     <a:solidFill>
-                      <a:srgbClr val="1E40AF"/>
+                      <a:srgbClr val="1C1C1C"/>
                     </a:solidFill>
                   </a:tcPr>
                 </a:tc>
@@ -4501,7 +4517,7 @@
                   </a:txBody>
                   <a:tcPr>
                     <a:solidFill>
-                      <a:srgbClr val="1E40AF"/>
+                      <a:srgbClr val="1C1C1C"/>
                     </a:solidFill>
                   </a:tcPr>
                 </a:tc>
@@ -4523,7 +4539,7 @@
                   </a:txBody>
                   <a:tcPr>
                     <a:solidFill>
-                      <a:srgbClr val="1E40AF"/>
+                      <a:srgbClr val="1C1C1C"/>
                     </a:solidFill>
                   </a:tcPr>
                 </a:tc>
@@ -4538,7 +4554,7 @@
                       <a:r>
                         <a:rPr sz="1100">
                           <a:solidFill>
-                            <a:srgbClr val="1E293B"/>
+                            <a:srgbClr val="EEEEEE"/>
                           </a:solidFill>
                         </a:rPr>
                         <a:t>字幕修正</a:t>
@@ -4556,7 +4572,7 @@
                       <a:r>
                         <a:rPr sz="1100">
                           <a:solidFill>
-                            <a:srgbClr val="1E293B"/>
+                            <a:srgbClr val="EEEEEE"/>
                           </a:solidFill>
                         </a:rPr>
                         <a:t>AI字幕のテキストを確認 → 誤認識・読み間違いを手動で修正</a:t>
@@ -4574,7 +4590,7 @@
                       <a:r>
                         <a:rPr sz="1100">
                           <a:solidFill>
-                            <a:srgbClr val="1E293B"/>
+                            <a:srgbClr val="EEEEEE"/>
                           </a:solidFill>
                         </a:rPr>
                         <a:t>〜15分</a:t>
@@ -4594,7 +4610,7 @@
                       <a:r>
                         <a:rPr sz="1100">
                           <a:solidFill>
-                            <a:srgbClr val="1E293B"/>
+                            <a:srgbClr val="EEEEEE"/>
                           </a:solidFill>
                         </a:rPr>
                         <a:t>クリップ編集</a:t>
@@ -4616,7 +4632,7 @@
                       <a:r>
                         <a:rPr sz="1100">
                           <a:solidFill>
-                            <a:srgbClr val="1E293B"/>
+                            <a:srgbClr val="EEEEEE"/>
                           </a:solidFill>
                         </a:rPr>
                         <a:t>タイミング調整・不要部分カット・テキスト追加・BGM追加など</a:t>
@@ -4638,7 +4654,7 @@
                       <a:r>
                         <a:rPr sz="1100">
                           <a:solidFill>
-                            <a:srgbClr val="1E293B"/>
+                            <a:srgbClr val="EEEEEE"/>
                           </a:solidFill>
                         </a:rPr>
                         <a:t>〜25分</a:t>
@@ -4662,7 +4678,7 @@
                       <a:r>
                         <a:rPr sz="1100">
                           <a:solidFill>
-                            <a:srgbClr val="1E293B"/>
+                            <a:srgbClr val="EEEEEE"/>
                           </a:solidFill>
                         </a:rPr>
                         <a:t>書き出し</a:t>
@@ -4680,7 +4696,7 @@
                       <a:r>
                         <a:rPr sz="1100">
                           <a:solidFill>
-                            <a:srgbClr val="1E293B"/>
+                            <a:srgbClr val="EEEEEE"/>
                           </a:solidFill>
                         </a:rPr>
                         <a:t>「書き出し」→ 解像度設定（1080p推奨）→ MP4で保存（1分動画は1〜3分程度）</a:t>
@@ -4698,7 +4714,7 @@
                       <a:r>
                         <a:rPr sz="1100">
                           <a:solidFill>
-                            <a:srgbClr val="1E293B"/>
+                            <a:srgbClr val="EEEEEE"/>
                           </a:solidFill>
                         </a:rPr>
                         <a:t>10分</a:t>
@@ -4738,7 +4754,7 @@
             <a:r>
               <a:rPr sz="1400" b="1" i="0">
                 <a:solidFill>
-                  <a:srgbClr val="1E40AF"/>
+                  <a:srgbClr val="1C1C1C"/>
                 </a:solidFill>
               </a:rPr>
               <a:t>基本編集の意義：AIが作った素材を人間が磨く — これが「完成品への最終仕上げ」</a:t>
@@ -4886,7 +4902,7 @@
     <p:bg>
       <p:bgPr>
         <a:solidFill>
-          <a:srgbClr val="1E40AF"/>
+          <a:srgbClr val="1C1C1C"/>
         </a:solidFill>
         <a:effectLst/>
       </p:bgPr>
@@ -5035,7 +5051,7 @@
             <a:r>
               <a:rPr sz="1400" b="0" i="0">
                 <a:solidFill>
-                  <a:srgbClr val="93C5FD"/>
+                  <a:srgbClr val="DA7756"/>
                 </a:solidFill>
               </a:rPr>
               <a:t>[10分]</a:t>
@@ -5069,7 +5085,7 @@
             <a:r>
               <a:rPr sz="1500" b="0" i="0">
                 <a:solidFill>
-                  <a:srgbClr val="BFDBFE"/>
+                  <a:srgbClr val="B8A99A"/>
                 </a:solidFill>
               </a:rPr>
               <a:t>ダウンロード・SNS投稿・活用アドバイス</a:t>
@@ -5088,6 +5104,14 @@
 <file path=ppt/slides/slide16.xml><?xml version="1.0" encoding="utf-8"?>
 <p:sld xmlns:a="http://schemas.openxmlformats.org/drawingml/2006/main" xmlns:p="http://schemas.openxmlformats.org/presentationml/2006/main" xmlns:r="http://schemas.openxmlformats.org/officeDocument/2006/relationships">
   <p:cSld>
+    <p:bg>
+      <p:bgPr>
+        <a:solidFill>
+          <a:srgbClr val="1C1C1C"/>
+        </a:solidFill>
+        <a:effectLst/>
+      </p:bgPr>
+    </p:bg>
     <p:spTree>
       <p:nvGrpSpPr>
         <p:cNvPr id="1" name=""/>
@@ -5110,7 +5134,7 @@
             <a:avLst/>
           </a:prstGeom>
           <a:solidFill>
-            <a:srgbClr val="1E40AF"/>
+            <a:srgbClr val="252525"/>
           </a:solidFill>
           <a:ln>
             <a:noFill/>
@@ -5198,7 +5222,7 @@
             <a:r>
               <a:rPr sz="1200" b="0" i="0">
                 <a:solidFill>
-                  <a:srgbClr val="93C5FD"/>
+                  <a:srgbClr val="DA7756"/>
                 </a:solidFill>
               </a:rPr>
               <a:t>[10分]</a:t>
@@ -5247,7 +5271,7 @@
                   </a:txBody>
                   <a:tcPr>
                     <a:solidFill>
-                      <a:srgbClr val="1E40AF"/>
+                      <a:srgbClr val="1C1C1C"/>
                     </a:solidFill>
                   </a:tcPr>
                 </a:tc>
@@ -5269,7 +5293,7 @@
                   </a:txBody>
                   <a:tcPr>
                     <a:solidFill>
-                      <a:srgbClr val="1E40AF"/>
+                      <a:srgbClr val="1C1C1C"/>
                     </a:solidFill>
                   </a:tcPr>
                 </a:tc>
@@ -5284,7 +5308,7 @@
                       <a:r>
                         <a:rPr sz="1100">
                           <a:solidFill>
-                            <a:srgbClr val="1E293B"/>
+                            <a:srgbClr val="EEEEEE"/>
                           </a:solidFill>
                         </a:rPr>
                         <a:t>ダウンロード</a:t>
@@ -5302,7 +5326,7 @@
                       <a:r>
                         <a:rPr sz="1100">
                           <a:solidFill>
-                            <a:srgbClr val="1E293B"/>
+                            <a:srgbClr val="EEEEEE"/>
                           </a:solidFill>
                         </a:rPr>
                         <a:t>スマホ・PCへの保存 → スマホはCapCutアプリからも保存可</a:t>
@@ -5322,7 +5346,7 @@
                       <a:r>
                         <a:rPr sz="1100">
                           <a:solidFill>
-                            <a:srgbClr val="1E293B"/>
+                            <a:srgbClr val="EEEEEE"/>
                           </a:solidFill>
                         </a:rPr>
                         <a:t>SNS投稿</a:t>
@@ -5344,7 +5368,7 @@
                       <a:r>
                         <a:rPr sz="1100">
                           <a:solidFill>
-                            <a:srgbClr val="1E293B"/>
+                            <a:srgbClr val="EEEEEE"/>
                           </a:solidFill>
                         </a:rPr>
                         <a:t>CapCutからTikTok・Instagramへ直接投稿できる</a:t>
@@ -5368,7 +5392,7 @@
                       <a:r>
                         <a:rPr sz="1100">
                           <a:solidFill>
-                            <a:srgbClr val="1E293B"/>
+                            <a:srgbClr val="EEEEEE"/>
                           </a:solidFill>
                         </a:rPr>
                         <a:t>後から編集</a:t>
@@ -5386,7 +5410,7 @@
                       <a:r>
                         <a:rPr sz="1100">
                           <a:solidFill>
-                            <a:srgbClr val="1E293B"/>
+                            <a:srgbClr val="EEEEEE"/>
                           </a:solidFill>
                         </a:rPr>
                         <a:t>CapCutアカウントにログインすれば続きから編集・複製して再利用</a:t>
@@ -5406,7 +5430,7 @@
                       <a:r>
                         <a:rPr sz="1100">
                           <a:solidFill>
-                            <a:srgbClr val="1E293B"/>
+                            <a:srgbClr val="EEEEEE"/>
                           </a:solidFill>
                         </a:rPr>
                         <a:t>量産のコツ</a:t>
@@ -5428,7 +5452,7 @@
                       <a:r>
                         <a:rPr sz="1100">
                           <a:solidFill>
-                            <a:srgbClr val="1E293B"/>
+                            <a:srgbClr val="EEEEEE"/>
                           </a:solidFill>
                         </a:rPr>
                         <a:t>テーマを変えれば今日と同じ流れで次の動画が作れる</a:t>
@@ -5461,7 +5485,7 @@
             <a:avLst/>
           </a:prstGeom>
           <a:solidFill>
-            <a:srgbClr val="EFF6FF"/>
+            <a:srgbClr val="2F2F2F"/>
           </a:solidFill>
           <a:ln>
             <a:noFill/>
@@ -5515,7 +5539,7 @@
             <a:r>
               <a:rPr sz="1300" b="1" i="0">
                 <a:solidFill>
-                  <a:srgbClr val="1E40AF"/>
+                  <a:srgbClr val="1C1C1C"/>
                 </a:solidFill>
               </a:rPr>
               <a:t>次のステップ | ざつね屋のサービス案内</a:t>
@@ -5548,7 +5572,7 @@
             <a:r>
               <a:rPr sz="1200">
                 <a:solidFill>
-                  <a:srgbClr val="1E293B"/>
+                  <a:srgbClr val="EEEEEE"/>
                 </a:solidFill>
               </a:rPr>
               <a:t>📚 実践編（画像系）でCanvaのデザイン力をさらに高める</a:t>
@@ -5558,7 +5582,7 @@
             <a:r>
               <a:rPr sz="1200" b="0" i="0">
                 <a:solidFill>
-                  <a:srgbClr val="1E293B"/>
+                  <a:srgbClr val="EEEEEE"/>
                 </a:solidFill>
               </a:rPr>
               <a:t>🛠 AI業務改善オーダーメイド・🤝 AI開発伴走 — 自社の課題を一緒に解決する</a:t>
@@ -5577,6 +5601,14 @@
 <file path=ppt/slides/slide2.xml><?xml version="1.0" encoding="utf-8"?>
 <p:sld xmlns:a="http://schemas.openxmlformats.org/drawingml/2006/main" xmlns:p="http://schemas.openxmlformats.org/presentationml/2006/main" xmlns:r="http://schemas.openxmlformats.org/officeDocument/2006/relationships">
   <p:cSld>
+    <p:bg>
+      <p:bgPr>
+        <a:solidFill>
+          <a:srgbClr val="1C1C1C"/>
+        </a:solidFill>
+        <a:effectLst/>
+      </p:bgPr>
+    </p:bg>
     <p:spTree>
       <p:nvGrpSpPr>
         <p:cNvPr id="1" name=""/>
@@ -5599,7 +5631,7 @@
             <a:avLst/>
           </a:prstGeom>
           <a:solidFill>
-            <a:srgbClr val="1E40AF"/>
+            <a:srgbClr val="252525"/>
           </a:solidFill>
           <a:ln>
             <a:noFill/>
@@ -5704,7 +5736,7 @@
                   </a:txBody>
                   <a:tcPr>
                     <a:solidFill>
-                      <a:srgbClr val="1E40AF"/>
+                      <a:srgbClr val="1C1C1C"/>
                     </a:solidFill>
                   </a:tcPr>
                 </a:tc>
@@ -5726,7 +5758,7 @@
                   </a:txBody>
                   <a:tcPr>
                     <a:solidFill>
-                      <a:srgbClr val="1E40AF"/>
+                      <a:srgbClr val="1C1C1C"/>
                     </a:solidFill>
                   </a:tcPr>
                 </a:tc>
@@ -5748,7 +5780,7 @@
                   </a:txBody>
                   <a:tcPr>
                     <a:solidFill>
-                      <a:srgbClr val="1E40AF"/>
+                      <a:srgbClr val="1C1C1C"/>
                     </a:solidFill>
                   </a:tcPr>
                 </a:tc>
@@ -5770,7 +5802,7 @@
                   </a:txBody>
                   <a:tcPr>
                     <a:solidFill>
-                      <a:srgbClr val="1E40AF"/>
+                      <a:srgbClr val="1C1C1C"/>
                     </a:solidFill>
                   </a:tcPr>
                 </a:tc>
@@ -5785,7 +5817,7 @@
                       <a:r>
                         <a:rPr sz="1100">
                           <a:solidFill>
-                            <a:srgbClr val="1E293B"/>
+                            <a:srgbClr val="EEEEEE"/>
                           </a:solidFill>
                         </a:rPr>
                         <a:t>1</a:t>
@@ -5803,7 +5835,7 @@
                       <a:r>
                         <a:rPr sz="1100">
                           <a:solidFill>
-                            <a:srgbClr val="1E293B"/>
+                            <a:srgbClr val="EEEEEE"/>
                           </a:solidFill>
                         </a:rPr>
                         <a:t>イントロ</a:t>
@@ -5821,7 +5853,7 @@
                       <a:r>
                         <a:rPr sz="1100">
                           <a:solidFill>
-                            <a:srgbClr val="1E293B"/>
+                            <a:srgbClr val="EEEEEE"/>
                           </a:solidFill>
                         </a:rPr>
                         <a:t>CapCutログイン確認・基本画面の説明</a:t>
@@ -5839,7 +5871,7 @@
                       <a:r>
                         <a:rPr sz="1100">
                           <a:solidFill>
-                            <a:srgbClr val="1E293B"/>
+                            <a:srgbClr val="EEEEEE"/>
                           </a:solidFill>
                         </a:rPr>
                         <a:t>10分</a:t>
@@ -5859,7 +5891,7 @@
                       <a:r>
                         <a:rPr sz="1100">
                           <a:solidFill>
-                            <a:srgbClr val="1E293B"/>
+                            <a:srgbClr val="EEEEEE"/>
                           </a:solidFill>
                         </a:rPr>
                         <a:t>2</a:t>
@@ -5881,7 +5913,7 @@
                       <a:r>
                         <a:rPr sz="1100">
                           <a:solidFill>
-                            <a:srgbClr val="1E293B"/>
+                            <a:srgbClr val="EEEEEE"/>
                           </a:solidFill>
                         </a:rPr>
                         <a:t>AI動画生成</a:t>
@@ -5903,7 +5935,7 @@
                       <a:r>
                         <a:rPr sz="1100">
                           <a:solidFill>
-                            <a:srgbClr val="1E293B"/>
+                            <a:srgbClr val="EEEEEE"/>
                           </a:solidFill>
                         </a:rPr>
                         <a:t>Seedanceでテキスト→映像生成</a:t>
@@ -5925,7 +5957,7 @@
                       <a:r>
                         <a:rPr sz="1100">
                           <a:solidFill>
-                            <a:srgbClr val="1E293B"/>
+                            <a:srgbClr val="EEEEEE"/>
                           </a:solidFill>
                         </a:rPr>
                         <a:t>15分</a:t>
@@ -5949,7 +5981,7 @@
                       <a:r>
                         <a:rPr sz="1100">
                           <a:solidFill>
-                            <a:srgbClr val="1E293B"/>
+                            <a:srgbClr val="EEEEEE"/>
                           </a:solidFill>
                         </a:rPr>
                         <a:t>3</a:t>
@@ -5967,7 +5999,7 @@
                       <a:r>
                         <a:rPr sz="1100">
                           <a:solidFill>
-                            <a:srgbClr val="1E293B"/>
+                            <a:srgbClr val="EEEEEE"/>
                           </a:solidFill>
                         </a:rPr>
                         <a:t>ナレーション追加</a:t>
@@ -5985,7 +6017,7 @@
                       <a:r>
                         <a:rPr sz="1100">
                           <a:solidFill>
-                            <a:srgbClr val="1E293B"/>
+                            <a:srgbClr val="EEEEEE"/>
                           </a:solidFill>
                         </a:rPr>
                         <a:t>Geminiで台本生成 → CapCut TTSで読み上げ</a:t>
@@ -6003,7 +6035,7 @@
                       <a:r>
                         <a:rPr sz="1100">
                           <a:solidFill>
-                            <a:srgbClr val="1E293B"/>
+                            <a:srgbClr val="EEEEEE"/>
                           </a:solidFill>
                         </a:rPr>
                         <a:t>15分</a:t>
@@ -6023,7 +6055,7 @@
                       <a:r>
                         <a:rPr sz="1100">
                           <a:solidFill>
-                            <a:srgbClr val="1E293B"/>
+                            <a:srgbClr val="EEEEEE"/>
                           </a:solidFill>
                         </a:rPr>
                         <a:t>4</a:t>
@@ -6045,7 +6077,7 @@
                       <a:r>
                         <a:rPr sz="1100">
                           <a:solidFill>
-                            <a:srgbClr val="1E293B"/>
+                            <a:srgbClr val="EEEEEE"/>
                           </a:solidFill>
                         </a:rPr>
                         <a:t>AI自動字幕</a:t>
@@ -6067,7 +6099,7 @@
                       <a:r>
                         <a:rPr sz="1100">
                           <a:solidFill>
-                            <a:srgbClr val="1E293B"/>
+                            <a:srgbClr val="EEEEEE"/>
                           </a:solidFill>
                         </a:rPr>
                         <a:t>字幕生成（確認まで）</a:t>
@@ -6089,7 +6121,7 @@
                       <a:r>
                         <a:rPr sz="1100">
                           <a:solidFill>
-                            <a:srgbClr val="1E293B"/>
+                            <a:srgbClr val="EEEEEE"/>
                           </a:solidFill>
                         </a:rPr>
                         <a:t>10分</a:t>
@@ -6113,7 +6145,7 @@
                       <a:r>
                         <a:rPr sz="1100">
                           <a:solidFill>
-                            <a:srgbClr val="1E293B"/>
+                            <a:srgbClr val="EEEEEE"/>
                           </a:solidFill>
                         </a:rPr>
                         <a:t>—</a:t>
@@ -6131,7 +6163,7 @@
                       <a:r>
                         <a:rPr sz="1100">
                           <a:solidFill>
-                            <a:srgbClr val="1E293B"/>
+                            <a:srgbClr val="EEEEEE"/>
                           </a:solidFill>
                         </a:rPr>
                         <a:t>休憩</a:t>
@@ -6149,7 +6181,7 @@
                       <a:r>
                         <a:rPr sz="1100">
                           <a:solidFill>
-                            <a:srgbClr val="1E293B"/>
+                            <a:srgbClr val="EEEEEE"/>
                           </a:solidFill>
                         </a:rPr>
                         <a:t/>
@@ -6167,7 +6199,7 @@
                       <a:r>
                         <a:rPr sz="1100">
                           <a:solidFill>
-                            <a:srgbClr val="1E293B"/>
+                            <a:srgbClr val="EEEEEE"/>
                           </a:solidFill>
                         </a:rPr>
                         <a:t>10分</a:t>
@@ -6187,7 +6219,7 @@
                       <a:r>
                         <a:rPr sz="1100">
                           <a:solidFill>
-                            <a:srgbClr val="1E293B"/>
+                            <a:srgbClr val="EEEEEE"/>
                           </a:solidFill>
                         </a:rPr>
                         <a:t>5</a:t>
@@ -6209,7 +6241,7 @@
                       <a:r>
                         <a:rPr sz="1100">
                           <a:solidFill>
-                            <a:srgbClr val="1E293B"/>
+                            <a:srgbClr val="EEEEEE"/>
                           </a:solidFill>
                         </a:rPr>
                         <a:t>基本編集・書き出し</a:t>
@@ -6231,7 +6263,7 @@
                       <a:r>
                         <a:rPr sz="1100">
                           <a:solidFill>
-                            <a:srgbClr val="1E293B"/>
+                            <a:srgbClr val="EEEEEE"/>
                           </a:solidFill>
                         </a:rPr>
                         <a:t>字幕修正＋クリップ編集＋書き出し</a:t>
@@ -6253,7 +6285,7 @@
                       <a:r>
                         <a:rPr sz="1100">
                           <a:solidFill>
-                            <a:srgbClr val="1E293B"/>
+                            <a:srgbClr val="EEEEEE"/>
                           </a:solidFill>
                         </a:rPr>
                         <a:t>50分</a:t>
@@ -6277,7 +6309,7 @@
                       <a:r>
                         <a:rPr sz="1100">
                           <a:solidFill>
-                            <a:srgbClr val="1E293B"/>
+                            <a:srgbClr val="EEEEEE"/>
                           </a:solidFill>
                         </a:rPr>
                         <a:t>6</a:t>
@@ -6295,7 +6327,7 @@
                       <a:r>
                         <a:rPr sz="1100">
                           <a:solidFill>
-                            <a:srgbClr val="1E293B"/>
+                            <a:srgbClr val="EEEEEE"/>
                           </a:solidFill>
                         </a:rPr>
                         <a:t>まとめ</a:t>
@@ -6313,7 +6345,7 @@
                       <a:r>
                         <a:rPr sz="1100">
                           <a:solidFill>
-                            <a:srgbClr val="1E293B"/>
+                            <a:srgbClr val="EEEEEE"/>
                           </a:solidFill>
                         </a:rPr>
                         <a:t>ダウンロード・SNS投稿・活用アドバイス</a:t>
@@ -6331,7 +6363,7 @@
                       <a:r>
                         <a:rPr sz="1100">
                           <a:solidFill>
-                            <a:srgbClr val="1E293B"/>
+                            <a:srgbClr val="EEEEEE"/>
                           </a:solidFill>
                         </a:rPr>
                         <a:t>10分</a:t>
@@ -6356,6 +6388,14 @@
 <file path=ppt/slides/slide3.xml><?xml version="1.0" encoding="utf-8"?>
 <p:sld xmlns:a="http://schemas.openxmlformats.org/drawingml/2006/main" xmlns:p="http://schemas.openxmlformats.org/presentationml/2006/main" xmlns:r="http://schemas.openxmlformats.org/officeDocument/2006/relationships">
   <p:cSld>
+    <p:bg>
+      <p:bgPr>
+        <a:solidFill>
+          <a:srgbClr val="1C1C1C"/>
+        </a:solidFill>
+        <a:effectLst/>
+      </p:bgPr>
+    </p:bg>
     <p:spTree>
       <p:nvGrpSpPr>
         <p:cNvPr id="1" name=""/>
@@ -6378,7 +6418,7 @@
             <a:avLst/>
           </a:prstGeom>
           <a:solidFill>
-            <a:srgbClr val="1E40AF"/>
+            <a:srgbClr val="252525"/>
           </a:solidFill>
           <a:ln>
             <a:noFill/>
@@ -6465,7 +6505,7 @@
             <a:r>
               <a:rPr sz="1500" b="1">
                 <a:solidFill>
-                  <a:srgbClr val="1E40AF"/>
+                  <a:srgbClr val="1C1C1C"/>
                 </a:solidFill>
               </a:rPr>
               <a:t>映像AI（Seedance）→ 文書AI（Gemini 台本）→ 読み上げAI（CapCut TTS）→ 字幕AI（CapCut）→ 人間が最終編集</a:t>
@@ -6515,7 +6555,7 @@
                   </a:txBody>
                   <a:tcPr>
                     <a:solidFill>
-                      <a:srgbClr val="1E40AF"/>
+                      <a:srgbClr val="1C1C1C"/>
                     </a:solidFill>
                   </a:tcPr>
                 </a:tc>
@@ -6537,7 +6577,7 @@
                   </a:txBody>
                   <a:tcPr>
                     <a:solidFill>
-                      <a:srgbClr val="1E40AF"/>
+                      <a:srgbClr val="1C1C1C"/>
                     </a:solidFill>
                   </a:tcPr>
                 </a:tc>
@@ -6559,7 +6599,7 @@
                   </a:txBody>
                   <a:tcPr>
                     <a:solidFill>
-                      <a:srgbClr val="1E40AF"/>
+                      <a:srgbClr val="1C1C1C"/>
                     </a:solidFill>
                   </a:tcPr>
                 </a:tc>
@@ -6574,7 +6614,7 @@
                       <a:r>
                         <a:rPr sz="1100">
                           <a:solidFill>
-                            <a:srgbClr val="1E293B"/>
+                            <a:srgbClr val="EEEEEE"/>
                           </a:solidFill>
                         </a:rPr>
                         <a:t>映像AI</a:t>
@@ -6592,7 +6632,7 @@
                       <a:r>
                         <a:rPr sz="1100">
                           <a:solidFill>
-                            <a:srgbClr val="1E293B"/>
+                            <a:srgbClr val="EEEEEE"/>
                           </a:solidFill>
                         </a:rPr>
                         <a:t>テキスト指示から映像クリップを生成</a:t>
@@ -6610,7 +6650,7 @@
                       <a:r>
                         <a:rPr sz="1100">
                           <a:solidFill>
-                            <a:srgbClr val="1E293B"/>
+                            <a:srgbClr val="EEEEEE"/>
                           </a:solidFill>
                         </a:rPr>
                         <a:t>CapCut Seedance</a:t>
@@ -6630,7 +6670,7 @@
                       <a:r>
                         <a:rPr sz="1100">
                           <a:solidFill>
-                            <a:srgbClr val="1E293B"/>
+                            <a:srgbClr val="EEEEEE"/>
                           </a:solidFill>
                         </a:rPr>
                         <a:t>文書AI</a:t>
@@ -6652,7 +6692,7 @@
                       <a:r>
                         <a:rPr sz="1100">
                           <a:solidFill>
-                            <a:srgbClr val="1E293B"/>
+                            <a:srgbClr val="EEEEEE"/>
                           </a:solidFill>
                         </a:rPr>
                         <a:t>ナレーション原稿（台本）を生成</a:t>
@@ -6674,7 +6714,7 @@
                       <a:r>
                         <a:rPr sz="1100">
                           <a:solidFill>
-                            <a:srgbClr val="1E293B"/>
+                            <a:srgbClr val="EEEEEE"/>
                           </a:solidFill>
                         </a:rPr>
                         <a:t>Gemini（無料版）</a:t>
@@ -6698,7 +6738,7 @@
                       <a:r>
                         <a:rPr sz="1100">
                           <a:solidFill>
-                            <a:srgbClr val="1E293B"/>
+                            <a:srgbClr val="EEEEEE"/>
                           </a:solidFill>
                         </a:rPr>
                         <a:t>読み上げAI</a:t>
@@ -6716,7 +6756,7 @@
                       <a:r>
                         <a:rPr sz="1100">
                           <a:solidFill>
-                            <a:srgbClr val="1E293B"/>
+                            <a:srgbClr val="EEEEEE"/>
                           </a:solidFill>
                         </a:rPr>
                         <a:t>台本テキストを音声に変換して映像に追加</a:t>
@@ -6734,7 +6774,7 @@
                       <a:r>
                         <a:rPr sz="1100">
                           <a:solidFill>
-                            <a:srgbClr val="1E293B"/>
+                            <a:srgbClr val="EEEEEE"/>
                           </a:solidFill>
                         </a:rPr>
                         <a:t>CapCut TTS</a:t>
@@ -6754,7 +6794,7 @@
                       <a:r>
                         <a:rPr sz="1100">
                           <a:solidFill>
-                            <a:srgbClr val="1E293B"/>
+                            <a:srgbClr val="EEEEEE"/>
                           </a:solidFill>
                         </a:rPr>
                         <a:t>字幕AI</a:t>
@@ -6776,7 +6816,7 @@
                       <a:r>
                         <a:rPr sz="1100">
                           <a:solidFill>
-                            <a:srgbClr val="1E293B"/>
+                            <a:srgbClr val="EEEEEE"/>
                           </a:solidFill>
                         </a:rPr>
                         <a:t>ナレーション音声から字幕を自動生成</a:t>
@@ -6798,7 +6838,7 @@
                       <a:r>
                         <a:rPr sz="1100">
                           <a:solidFill>
-                            <a:srgbClr val="1E293B"/>
+                            <a:srgbClr val="EEEEEE"/>
                           </a:solidFill>
                         </a:rPr>
                         <a:t>CapCut AI字幕</a:t>
@@ -6822,7 +6862,7 @@
                       <a:r>
                         <a:rPr sz="1100">
                           <a:solidFill>
-                            <a:srgbClr val="1E293B"/>
+                            <a:srgbClr val="EEEEEE"/>
                           </a:solidFill>
                         </a:rPr>
                         <a:t>人間</a:t>
@@ -6840,7 +6880,7 @@
                       <a:r>
                         <a:rPr sz="1100">
                           <a:solidFill>
-                            <a:srgbClr val="1E293B"/>
+                            <a:srgbClr val="EEEEEE"/>
                           </a:solidFill>
                         </a:rPr>
                         <a:t>字幕修正・クリップ編集・BGM追加・完成品の書き出し</a:t>
@@ -6858,7 +6898,7 @@
                       <a:r>
                         <a:rPr sz="1100">
                           <a:solidFill>
-                            <a:srgbClr val="1E293B"/>
+                            <a:srgbClr val="EEEEEE"/>
                           </a:solidFill>
                         </a:rPr>
                         <a:t>CapCut 手動編集</a:t>
@@ -6886,7 +6926,7 @@
     <p:bg>
       <p:bgPr>
         <a:solidFill>
-          <a:srgbClr val="1E40AF"/>
+          <a:srgbClr val="1C1C1C"/>
         </a:solidFill>
         <a:effectLst/>
       </p:bgPr>
@@ -7035,7 +7075,7 @@
             <a:r>
               <a:rPr sz="1400" b="0" i="0">
                 <a:solidFill>
-                  <a:srgbClr val="93C5FD"/>
+                  <a:srgbClr val="DA7756"/>
                 </a:solidFill>
               </a:rPr>
               <a:t>[10分]</a:t>
@@ -7069,7 +7109,7 @@
             <a:r>
               <a:rPr sz="1500" b="0" i="0">
                 <a:solidFill>
-                  <a:srgbClr val="BFDBFE"/>
+                  <a:srgbClr val="B8A99A"/>
                 </a:solidFill>
               </a:rPr>
               <a:t>CapCutにログインして基本画面を確認</a:t>
@@ -7088,6 +7128,14 @@
 <file path=ppt/slides/slide5.xml><?xml version="1.0" encoding="utf-8"?>
 <p:sld xmlns:a="http://schemas.openxmlformats.org/drawingml/2006/main" xmlns:p="http://schemas.openxmlformats.org/presentationml/2006/main" xmlns:r="http://schemas.openxmlformats.org/officeDocument/2006/relationships">
   <p:cSld>
+    <p:bg>
+      <p:bgPr>
+        <a:solidFill>
+          <a:srgbClr val="1C1C1C"/>
+        </a:solidFill>
+        <a:effectLst/>
+      </p:bgPr>
+    </p:bg>
     <p:spTree>
       <p:nvGrpSpPr>
         <p:cNvPr id="1" name=""/>
@@ -7110,7 +7158,7 @@
             <a:avLst/>
           </a:prstGeom>
           <a:solidFill>
-            <a:srgbClr val="1E40AF"/>
+            <a:srgbClr val="252525"/>
           </a:solidFill>
           <a:ln>
             <a:noFill/>
@@ -7198,7 +7246,7 @@
             <a:r>
               <a:rPr sz="1200" b="0" i="0">
                 <a:solidFill>
-                  <a:srgbClr val="93C5FD"/>
+                  <a:srgbClr val="DA7756"/>
                 </a:solidFill>
               </a:rPr>
               <a:t>[10分]</a:t>
@@ -7247,7 +7295,7 @@
                   </a:txBody>
                   <a:tcPr>
                     <a:solidFill>
-                      <a:srgbClr val="1E40AF"/>
+                      <a:srgbClr val="1C1C1C"/>
                     </a:solidFill>
                   </a:tcPr>
                 </a:tc>
@@ -7269,7 +7317,7 @@
                   </a:txBody>
                   <a:tcPr>
                     <a:solidFill>
-                      <a:srgbClr val="1E40AF"/>
+                      <a:srgbClr val="1C1C1C"/>
                     </a:solidFill>
                   </a:tcPr>
                 </a:tc>
@@ -7284,7 +7332,7 @@
                       <a:r>
                         <a:rPr sz="1100">
                           <a:solidFill>
-                            <a:srgbClr val="1E293B"/>
+                            <a:srgbClr val="EEEEEE"/>
                           </a:solidFill>
                         </a:rPr>
                         <a:t>CapCutログイン</a:t>
@@ -7302,7 +7350,7 @@
                       <a:r>
                         <a:rPr sz="1100">
                           <a:solidFill>
-                            <a:srgbClr val="1E293B"/>
+                            <a:srgbClr val="EEEEEE"/>
                           </a:solidFill>
                         </a:rPr>
                         <a:t>capcut.com または CapCutアプリ（PC版推奨）でTikTokアカウント or Google / Appleで登録</a:t>
@@ -7322,7 +7370,7 @@
                       <a:r>
                         <a:rPr sz="1100">
                           <a:solidFill>
-                            <a:srgbClr val="1E293B"/>
+                            <a:srgbClr val="EEEEEE"/>
                           </a:solidFill>
                         </a:rPr>
                         <a:t>新規プロジェクト</a:t>
@@ -7344,7 +7392,7 @@
                       <a:r>
                         <a:rPr sz="1100">
                           <a:solidFill>
-                            <a:srgbClr val="1E293B"/>
+                            <a:srgbClr val="EEEEEE"/>
                           </a:solidFill>
                         </a:rPr>
                         <a:t>「新規作成」→「ビデオ」を選択して編集画面へ</a:t>
@@ -7368,7 +7416,7 @@
                       <a:r>
                         <a:rPr sz="1100">
                           <a:solidFill>
-                            <a:srgbClr val="1E293B"/>
+                            <a:srgbClr val="EEEEEE"/>
                           </a:solidFill>
                         </a:rPr>
                         <a:t>Seedance</a:t>
@@ -7386,7 +7434,7 @@
                       <a:r>
                         <a:rPr sz="1100">
                           <a:solidFill>
-                            <a:srgbClr val="1E293B"/>
+                            <a:srgbClr val="EEEEEE"/>
                           </a:solidFill>
                         </a:rPr>
                         <a:t>「AI」メニュー内 → テキストから映像を生成する機能（クレジット制）</a:t>
@@ -7406,7 +7454,7 @@
                       <a:r>
                         <a:rPr sz="1100">
                           <a:solidFill>
-                            <a:srgbClr val="1E293B"/>
+                            <a:srgbClr val="EEEEEE"/>
                           </a:solidFill>
                         </a:rPr>
                         <a:t>TTS（テキスト読み上げ）</a:t>
@@ -7428,7 +7476,7 @@
                       <a:r>
                         <a:rPr sz="1100">
                           <a:solidFill>
-                            <a:srgbClr val="1E293B"/>
+                            <a:srgbClr val="EEEEEE"/>
                           </a:solidFill>
                         </a:rPr>
                         <a:t>「テキスト」→「テキスト読み上げ」で台本を音声に変換</a:t>
@@ -7452,7 +7500,7 @@
                       <a:r>
                         <a:rPr sz="1100">
                           <a:solidFill>
-                            <a:srgbClr val="1E293B"/>
+                            <a:srgbClr val="EEEEEE"/>
                           </a:solidFill>
                         </a:rPr>
                         <a:t>AI字幕</a:t>
@@ -7470,7 +7518,7 @@
                       <a:r>
                         <a:rPr sz="1100">
                           <a:solidFill>
-                            <a:srgbClr val="1E293B"/>
+                            <a:srgbClr val="EEEEEE"/>
                           </a:solidFill>
                         </a:rPr>
                         <a:t>「字幕」→「自動字幕生成」で音声から字幕を自動生成（月2回まで無料）</a:t>
@@ -7575,7 +7623,7 @@
     <p:bg>
       <p:bgPr>
         <a:solidFill>
-          <a:srgbClr val="1E40AF"/>
+          <a:srgbClr val="1C1C1C"/>
         </a:solidFill>
         <a:effectLst/>
       </p:bgPr>
@@ -7724,7 +7772,7 @@
             <a:r>
               <a:rPr sz="1400" b="0" i="0">
                 <a:solidFill>
-                  <a:srgbClr val="93C5FD"/>
+                  <a:srgbClr val="DA7756"/>
                 </a:solidFill>
               </a:rPr>
               <a:t>[15分]</a:t>
@@ -7758,7 +7806,7 @@
             <a:r>
               <a:rPr sz="1500" b="0" i="0">
                 <a:solidFill>
-                  <a:srgbClr val="BFDBFE"/>
+                  <a:srgbClr val="B8A99A"/>
                 </a:solidFill>
               </a:rPr>
               <a:t>テキスト指示だけで映像クリップが生成される体験</a:t>
@@ -7777,6 +7825,14 @@
 <file path=ppt/slides/slide7.xml><?xml version="1.0" encoding="utf-8"?>
 <p:sld xmlns:a="http://schemas.openxmlformats.org/drawingml/2006/main" xmlns:p="http://schemas.openxmlformats.org/presentationml/2006/main" xmlns:r="http://schemas.openxmlformats.org/officeDocument/2006/relationships">
   <p:cSld>
+    <p:bg>
+      <p:bgPr>
+        <a:solidFill>
+          <a:srgbClr val="1C1C1C"/>
+        </a:solidFill>
+        <a:effectLst/>
+      </p:bgPr>
+    </p:bg>
     <p:spTree>
       <p:nvGrpSpPr>
         <p:cNvPr id="1" name=""/>
@@ -7799,7 +7855,7 @@
             <a:avLst/>
           </a:prstGeom>
           <a:solidFill>
-            <a:srgbClr val="1E40AF"/>
+            <a:srgbClr val="252525"/>
           </a:solidFill>
           <a:ln>
             <a:noFill/>
@@ -7887,7 +7943,7 @@
             <a:r>
               <a:rPr sz="1200" b="0" i="0">
                 <a:solidFill>
-                  <a:srgbClr val="93C5FD"/>
+                  <a:srgbClr val="DA7756"/>
                 </a:solidFill>
               </a:rPr>
               <a:t>[デモ5分 + 実践10分 + DL]</a:t>
@@ -7936,7 +7992,7 @@
                   </a:txBody>
                   <a:tcPr>
                     <a:solidFill>
-                      <a:srgbClr val="1E40AF"/>
+                      <a:srgbClr val="1C1C1C"/>
                     </a:solidFill>
                   </a:tcPr>
                 </a:tc>
@@ -7958,7 +8014,7 @@
                   </a:txBody>
                   <a:tcPr>
                     <a:solidFill>
-                      <a:srgbClr val="1E40AF"/>
+                      <a:srgbClr val="1C1C1C"/>
                     </a:solidFill>
                   </a:tcPr>
                 </a:tc>
@@ -7973,7 +8029,7 @@
                       <a:r>
                         <a:rPr sz="1100">
                           <a:solidFill>
-                            <a:srgbClr val="1E293B"/>
+                            <a:srgbClr val="EEEEEE"/>
                           </a:solidFill>
                         </a:rPr>
                         <a:t>1 Seedanceを開く</a:t>
@@ -7991,7 +8047,7 @@
                       <a:r>
                         <a:rPr sz="1100">
                           <a:solidFill>
-                            <a:srgbClr val="1E293B"/>
+                            <a:srgbClr val="EEEEEE"/>
                           </a:solidFill>
                         </a:rPr>
                         <a:t>CapCut「AI」メニュー → 「Seedance」を選択</a:t>
@@ -8011,7 +8067,7 @@
                       <a:r>
                         <a:rPr sz="1100">
                           <a:solidFill>
-                            <a:srgbClr val="1E293B"/>
+                            <a:srgbClr val="EEEEEE"/>
                           </a:solidFill>
                         </a:rPr>
                         <a:t>2 テキストを入力</a:t>
@@ -8033,7 +8089,7 @@
                       <a:r>
                         <a:rPr sz="1100">
                           <a:solidFill>
-                            <a:srgbClr val="1E293B"/>
+                            <a:srgbClr val="EEEEEE"/>
                           </a:solidFill>
                         </a:rPr>
                         <a:t>「どんな映像にしたいか」を日本語で説明 → 生成（30秒〜1分程度かかる）</a:t>
@@ -8057,7 +8113,7 @@
                       <a:r>
                         <a:rPr sz="1100">
                           <a:solidFill>
-                            <a:srgbClr val="1E293B"/>
+                            <a:srgbClr val="EEEEEE"/>
                           </a:solidFill>
                         </a:rPr>
                         <a:t>3 映像を確認</a:t>
@@ -8075,7 +8131,7 @@
                       <a:r>
                         <a:rPr sz="1100">
                           <a:solidFill>
-                            <a:srgbClr val="1E293B"/>
+                            <a:srgbClr val="EEEEEE"/>
                           </a:solidFill>
                         </a:rPr>
                         <a:t>生成された映像クリップを再生して確認 → 気に入ったらプロジェクトに追加</a:t>
@@ -8095,7 +8151,7 @@
                       <a:r>
                         <a:rPr sz="1100">
                           <a:solidFill>
-                            <a:srgbClr val="1E293B"/>
+                            <a:srgbClr val="EEEEEE"/>
                           </a:solidFill>
                         </a:rPr>
                         <a:t>4 繰り返し</a:t>
@@ -8117,7 +8173,7 @@
                       <a:r>
                         <a:rPr sz="1100">
                           <a:solidFill>
-                            <a:srgbClr val="1E293B"/>
+                            <a:srgbClr val="EEEEEE"/>
                           </a:solidFill>
                         </a:rPr>
                         <a:t>別のシーンを追加したい場合は再度テキストを入力して生成</a:t>
@@ -8161,7 +8217,7 @@
             <a:r>
               <a:rPr sz="1300" b="1" i="0">
                 <a:solidFill>
-                  <a:srgbClr val="1E293B"/>
+                  <a:srgbClr val="EEEEEE"/>
                 </a:solidFill>
               </a:rPr>
               <a:t>生成テーマ例（自由に選んでください）：</a:t>
@@ -8346,7 +8402,7 @@
     <p:bg>
       <p:bgPr>
         <a:solidFill>
-          <a:srgbClr val="1E40AF"/>
+          <a:srgbClr val="1C1C1C"/>
         </a:solidFill>
         <a:effectLst/>
       </p:bgPr>
@@ -8495,7 +8551,7 @@
             <a:r>
               <a:rPr sz="1400" b="0" i="0">
                 <a:solidFill>
-                  <a:srgbClr val="93C5FD"/>
+                  <a:srgbClr val="DA7756"/>
                 </a:solidFill>
               </a:rPr>
               <a:t>[15分]</a:t>
@@ -8529,7 +8585,7 @@
             <a:r>
               <a:rPr sz="1500" b="0" i="0">
                 <a:solidFill>
-                  <a:srgbClr val="BFDBFE"/>
+                  <a:srgbClr val="B8A99A"/>
                 </a:solidFill>
               </a:rPr>
               <a:t>Geminiで台本を作り → CapCut TTSで音声に変換</a:t>
@@ -8548,6 +8604,14 @@
 <file path=ppt/slides/slide9.xml><?xml version="1.0" encoding="utf-8"?>
 <p:sld xmlns:a="http://schemas.openxmlformats.org/drawingml/2006/main" xmlns:p="http://schemas.openxmlformats.org/presentationml/2006/main" xmlns:r="http://schemas.openxmlformats.org/officeDocument/2006/relationships">
   <p:cSld>
+    <p:bg>
+      <p:bgPr>
+        <a:solidFill>
+          <a:srgbClr val="1C1C1C"/>
+        </a:solidFill>
+        <a:effectLst/>
+      </p:bgPr>
+    </p:bg>
     <p:spTree>
       <p:nvGrpSpPr>
         <p:cNvPr id="1" name=""/>
@@ -8570,7 +8634,7 @@
             <a:avLst/>
           </a:prstGeom>
           <a:solidFill>
-            <a:srgbClr val="1E40AF"/>
+            <a:srgbClr val="252525"/>
           </a:solidFill>
           <a:ln>
             <a:noFill/>
@@ -8658,7 +8722,7 @@
             <a:r>
               <a:rPr sz="1200" b="0" i="0">
                 <a:solidFill>
-                  <a:srgbClr val="93C5FD"/>
+                  <a:srgbClr val="DA7756"/>
                 </a:solidFill>
               </a:rPr>
               <a:t>[15分]</a:t>
@@ -8708,7 +8772,7 @@
                   </a:txBody>
                   <a:tcPr>
                     <a:solidFill>
-                      <a:srgbClr val="1E40AF"/>
+                      <a:srgbClr val="1C1C1C"/>
                     </a:solidFill>
                   </a:tcPr>
                 </a:tc>
@@ -8730,7 +8794,7 @@
                   </a:txBody>
                   <a:tcPr>
                     <a:solidFill>
-                      <a:srgbClr val="1E40AF"/>
+                      <a:srgbClr val="1C1C1C"/>
                     </a:solidFill>
                   </a:tcPr>
                 </a:tc>
@@ -8752,7 +8816,7 @@
                   </a:txBody>
                   <a:tcPr>
                     <a:solidFill>
-                      <a:srgbClr val="1E40AF"/>
+                      <a:srgbClr val="1C1C1C"/>
                     </a:solidFill>
                   </a:tcPr>
                 </a:tc>
@@ -8767,7 +8831,7 @@
                       <a:r>
                         <a:rPr sz="1100">
                           <a:solidFill>
-                            <a:srgbClr val="1E293B"/>
+                            <a:srgbClr val="EEEEEE"/>
                           </a:solidFill>
                         </a:rPr>
                         <a:t>1 Geminiを開く</a:t>
@@ -8785,7 +8849,7 @@
                       <a:r>
                         <a:rPr sz="1100">
                           <a:solidFill>
-                            <a:srgbClr val="1E293B"/>
+                            <a:srgbClr val="EEEEEE"/>
                           </a:solidFill>
                         </a:rPr>
                         <a:t>gemini.google.com にアクセス（Googleアカウントでログイン）</a:t>
@@ -8803,7 +8867,7 @@
                       <a:r>
                         <a:rPr sz="1100">
                           <a:solidFill>
-                            <a:srgbClr val="1E293B"/>
+                            <a:srgbClr val="EEEEEE"/>
                           </a:solidFill>
                         </a:rPr>
                         <a:t>Gemini</a:t>
@@ -8823,7 +8887,7 @@
                       <a:r>
                         <a:rPr sz="1100">
                           <a:solidFill>
-                            <a:srgbClr val="1E293B"/>
+                            <a:srgbClr val="EEEEEE"/>
                           </a:solidFill>
                         </a:rPr>
                         <a:t>2 台本を生成</a:t>
@@ -8845,7 +8909,7 @@
                       <a:r>
                         <a:rPr sz="1100">
                           <a:solidFill>
-                            <a:srgbClr val="1E293B"/>
+                            <a:srgbClr val="EEEEEE"/>
                           </a:solidFill>
                         </a:rPr>
                         <a:t>ひな型でプロンプトを入力 → 生成された台本テキストをコピー</a:t>
@@ -8867,7 +8931,7 @@
                       <a:r>
                         <a:rPr sz="1100">
                           <a:solidFill>
-                            <a:srgbClr val="1E293B"/>
+                            <a:srgbClr val="EEEEEE"/>
                           </a:solidFill>
                         </a:rPr>
                         <a:t>Gemini</a:t>
@@ -8891,7 +8955,7 @@
                       <a:r>
                         <a:rPr sz="1100">
                           <a:solidFill>
-                            <a:srgbClr val="1E293B"/>
+                            <a:srgbClr val="EEEEEE"/>
                           </a:solidFill>
                         </a:rPr>
                         <a:t>3 TTSに貼り付け</a:t>
@@ -8909,7 +8973,7 @@
                       <a:r>
                         <a:rPr sz="1100">
                           <a:solidFill>
-                            <a:srgbClr val="1E293B"/>
+                            <a:srgbClr val="EEEEEE"/>
                           </a:solidFill>
                         </a:rPr>
                         <a:t>CapCut「テキスト」→「テキスト読み上げ」→ 台本をペースト</a:t>
@@ -8927,7 +8991,7 @@
                       <a:r>
                         <a:rPr sz="1100">
                           <a:solidFill>
-                            <a:srgbClr val="1E293B"/>
+                            <a:srgbClr val="EEEEEE"/>
                           </a:solidFill>
                         </a:rPr>
                         <a:t>CapCut</a:t>
@@ -8947,7 +9011,7 @@
                       <a:r>
                         <a:rPr sz="1100">
                           <a:solidFill>
-                            <a:srgbClr val="1E293B"/>
+                            <a:srgbClr val="EEEEEE"/>
                           </a:solidFill>
                         </a:rPr>
                         <a:t>4 声を選ぶ</a:t>
@@ -8969,7 +9033,7 @@
                       <a:r>
                         <a:rPr sz="1100">
                           <a:solidFill>
-                            <a:srgbClr val="1E293B"/>
+                            <a:srgbClr val="EEEEEE"/>
                           </a:solidFill>
                         </a:rPr>
                         <a:t>日本語の音声種類（男性・女性・落ち着き・明るい等）を選択</a:t>
@@ -8991,7 +9055,7 @@
                       <a:r>
                         <a:rPr sz="1100">
                           <a:solidFill>
-                            <a:srgbClr val="1E293B"/>
+                            <a:srgbClr val="EEEEEE"/>
                           </a:solidFill>
                         </a:rPr>
                         <a:t>CapCut</a:t>
@@ -9015,7 +9079,7 @@
                       <a:r>
                         <a:rPr sz="1100">
                           <a:solidFill>
-                            <a:srgbClr val="1E293B"/>
+                            <a:srgbClr val="EEEEEE"/>
                           </a:solidFill>
                         </a:rPr>
                         <a:t>5 映像に追加</a:t>
@@ -9033,7 +9097,7 @@
                       <a:r>
                         <a:rPr sz="1100">
                           <a:solidFill>
-                            <a:srgbClr val="1E293B"/>
+                            <a:srgbClr val="EEEEEE"/>
                           </a:solidFill>
                         </a:rPr>
                         <a:t>生成された音声をタイムラインに追加・長さを調整</a:t>
@@ -9051,7 +9115,7 @@
                       <a:r>
                         <a:rPr sz="1100">
                           <a:solidFill>
-                            <a:srgbClr val="1E293B"/>
+                            <a:srgbClr val="EEEEEE"/>
                           </a:solidFill>
                         </a:rPr>
                         <a:t>CapCut</a:t>
@@ -9080,7 +9144,7 @@
             <a:avLst/>
           </a:prstGeom>
           <a:solidFill>
-            <a:srgbClr val="EFF6FF"/>
+            <a:srgbClr val="2F2F2F"/>
           </a:solidFill>
           <a:ln>
             <a:noFill/>
@@ -9134,7 +9198,7 @@
             <a:r>
               <a:rPr sz="1300" b="0" i="0">
                 <a:solidFill>
-                  <a:srgbClr val="1E293B"/>
+                  <a:srgbClr val="EEEEEE"/>
                 </a:solidFill>
               </a:rPr>
               <a:t>台本ひな型：「[テーマ]の紹介動画のナレーション原稿を30秒で読める長さ（130字程度）で作ってください」</a:t>

--- a/00-01_han-ai/training-materials/course04_jissen_doga.pptx
+++ b/00-01_han-ai/training-materials/course04_jissen_doga.pptx
@@ -3681,9 +3681,7 @@
         <a:graphic>
           <a:graphicData uri="http://schemas.openxmlformats.org/drawingml/2006/table">
             <a:tbl>
-              <a:tblPr firstRow="1" bandRow="1">
-                <a:tableStyleId>{5C22544A-7EE6-4342-B048-85BDC9FD1C3A}</a:tableStyleId>
-              </a:tblPr>
+              <a:tblPr/>
               <a:tblGrid>
                 <a:gridCol w="2304288"/>
                 <a:gridCol w="5925312"/>
@@ -4468,9 +4466,7 @@
         <a:graphic>
           <a:graphicData uri="http://schemas.openxmlformats.org/drawingml/2006/table">
             <a:tbl>
-              <a:tblPr firstRow="1" bandRow="1">
-                <a:tableStyleId>{5C22544A-7EE6-4342-B048-85BDC9FD1C3A}</a:tableStyleId>
-              </a:tblPr>
+              <a:tblPr/>
               <a:tblGrid>
                 <a:gridCol w="1810512"/>
                 <a:gridCol w="4526280"/>
@@ -5245,9 +5241,7 @@
         <a:graphic>
           <a:graphicData uri="http://schemas.openxmlformats.org/drawingml/2006/table">
             <a:tbl>
-              <a:tblPr firstRow="1" bandRow="1">
-                <a:tableStyleId>{5C22544A-7EE6-4342-B048-85BDC9FD1C3A}</a:tableStyleId>
-              </a:tblPr>
+              <a:tblPr/>
               <a:tblGrid>
                 <a:gridCol w="2057400"/>
                 <a:gridCol w="6172200"/>
@@ -5708,9 +5702,7 @@
         <a:graphic>
           <a:graphicData uri="http://schemas.openxmlformats.org/drawingml/2006/table">
             <a:tbl>
-              <a:tblPr firstRow="1" bandRow="1">
-                <a:tableStyleId>{5C22544A-7EE6-4342-B048-85BDC9FD1C3A}</a:tableStyleId>
-              </a:tblPr>
+              <a:tblPr/>
               <a:tblGrid>
                 <a:gridCol w="493776"/>
                 <a:gridCol w="1810512"/>
@@ -6528,9 +6520,7 @@
         <a:graphic>
           <a:graphicData uri="http://schemas.openxmlformats.org/drawingml/2006/table">
             <a:tbl>
-              <a:tblPr firstRow="1" bandRow="1">
-                <a:tableStyleId>{5C22544A-7EE6-4342-B048-85BDC9FD1C3A}</a:tableStyleId>
-              </a:tblPr>
+              <a:tblPr/>
               <a:tblGrid>
                 <a:gridCol w="1645920"/>
                 <a:gridCol w="3291840"/>
@@ -7269,9 +7259,7 @@
         <a:graphic>
           <a:graphicData uri="http://schemas.openxmlformats.org/drawingml/2006/table">
             <a:tbl>
-              <a:tblPr firstRow="1" bandRow="1">
-                <a:tableStyleId>{5C22544A-7EE6-4342-B048-85BDC9FD1C3A}</a:tableStyleId>
-              </a:tblPr>
+              <a:tblPr/>
               <a:tblGrid>
                 <a:gridCol w="2304288"/>
                 <a:gridCol w="5925312"/>
@@ -7966,9 +7954,7 @@
         <a:graphic>
           <a:graphicData uri="http://schemas.openxmlformats.org/drawingml/2006/table">
             <a:tbl>
-              <a:tblPr firstRow="1" bandRow="1">
-                <a:tableStyleId>{5C22544A-7EE6-4342-B048-85BDC9FD1C3A}</a:tableStyleId>
-              </a:tblPr>
+              <a:tblPr/>
               <a:tblGrid>
                 <a:gridCol w="2057400"/>
                 <a:gridCol w="6172200"/>
@@ -8745,9 +8731,7 @@
         <a:graphic>
           <a:graphicData uri="http://schemas.openxmlformats.org/drawingml/2006/table">
             <a:tbl>
-              <a:tblPr firstRow="1" bandRow="1">
-                <a:tableStyleId>{5C22544A-7EE6-4342-B048-85BDC9FD1C3A}</a:tableStyleId>
-              </a:tblPr>
+              <a:tblPr/>
               <a:tblGrid>
                 <a:gridCol w="1810512"/>
                 <a:gridCol w="4526280"/>

--- a/00-01_han-ai/training-materials/course04_jissen_doga.pptx
+++ b/00-01_han-ai/training-materials/course04_jissen_doga.pptx
@@ -124,6 +124,14 @@
 
 <file path=ppt/slideLayouts/slideLayout1.xml><?xml version="1.0" encoding="utf-8"?>
 <p:sldLayout xmlns:a="http://schemas.openxmlformats.org/drawingml/2006/main" xmlns:r="http://schemas.openxmlformats.org/officeDocument/2006/relationships" xmlns:p="http://schemas.openxmlformats.org/presentationml/2006/main" type="title" preserve="1">
+  <p:bg>
+    <p:bgPr>
+      <a:solidFill>
+        <a:srgbClr val="1C1C1C"/>
+      </a:solidFill>
+      <a:effectLst/>
+    </p:bgPr>
+  </p:bg>
   <p:cSld name="Title Slide">
     <p:spTree>
       <p:nvGrpSpPr>
@@ -366,6 +374,14 @@
 
 <file path=ppt/slideLayouts/slideLayout10.xml><?xml version="1.0" encoding="utf-8"?>
 <p:sldLayout xmlns:a="http://schemas.openxmlformats.org/drawingml/2006/main" xmlns:r="http://schemas.openxmlformats.org/officeDocument/2006/relationships" xmlns:p="http://schemas.openxmlformats.org/presentationml/2006/main" type="vertTx" preserve="1">
+  <p:bg>
+    <p:bgPr>
+      <a:solidFill>
+        <a:srgbClr val="1C1C1C"/>
+      </a:solidFill>
+      <a:effectLst/>
+    </p:bgPr>
+  </p:bg>
   <p:cSld name="Title and Vertical Text">
     <p:spTree>
       <p:nvGrpSpPr>
@@ -536,6 +552,14 @@
 
 <file path=ppt/slideLayouts/slideLayout11.xml><?xml version="1.0" encoding="utf-8"?>
 <p:sldLayout xmlns:a="http://schemas.openxmlformats.org/drawingml/2006/main" xmlns:r="http://schemas.openxmlformats.org/officeDocument/2006/relationships" xmlns:p="http://schemas.openxmlformats.org/presentationml/2006/main" type="vertTitleAndTx" preserve="1">
+  <p:bg>
+    <p:bgPr>
+      <a:solidFill>
+        <a:srgbClr val="1C1C1C"/>
+      </a:solidFill>
+      <a:effectLst/>
+    </p:bgPr>
+  </p:bg>
   <p:cSld name="Vertical Title and Text">
     <p:spTree>
       <p:nvGrpSpPr>
@@ -716,6 +740,14 @@
 
 <file path=ppt/slideLayouts/slideLayout2.xml><?xml version="1.0" encoding="utf-8"?>
 <p:sldLayout xmlns:a="http://schemas.openxmlformats.org/drawingml/2006/main" xmlns:r="http://schemas.openxmlformats.org/officeDocument/2006/relationships" xmlns:p="http://schemas.openxmlformats.org/presentationml/2006/main" type="obj" preserve="1">
+  <p:bg>
+    <p:bgPr>
+      <a:solidFill>
+        <a:srgbClr val="1C1C1C"/>
+      </a:solidFill>
+      <a:effectLst/>
+    </p:bgPr>
+  </p:bg>
   <p:cSld name="Title and Content">
     <p:spTree>
       <p:nvGrpSpPr>
@@ -886,6 +918,14 @@
 
 <file path=ppt/slideLayouts/slideLayout3.xml><?xml version="1.0" encoding="utf-8"?>
 <p:sldLayout xmlns:a="http://schemas.openxmlformats.org/drawingml/2006/main" xmlns:r="http://schemas.openxmlformats.org/officeDocument/2006/relationships" xmlns:p="http://schemas.openxmlformats.org/presentationml/2006/main" type="secHead" preserve="1">
+  <p:bg>
+    <p:bgPr>
+      <a:solidFill>
+        <a:srgbClr val="1C1C1C"/>
+      </a:solidFill>
+      <a:effectLst/>
+    </p:bgPr>
+  </p:bg>
   <p:cSld name="Section Header">
     <p:spTree>
       <p:nvGrpSpPr>
@@ -1132,6 +1172,14 @@
 
 <file path=ppt/slideLayouts/slideLayout4.xml><?xml version="1.0" encoding="utf-8"?>
 <p:sldLayout xmlns:a="http://schemas.openxmlformats.org/drawingml/2006/main" xmlns:r="http://schemas.openxmlformats.org/officeDocument/2006/relationships" xmlns:p="http://schemas.openxmlformats.org/presentationml/2006/main" type="twoObj" preserve="1">
+  <p:bg>
+    <p:bgPr>
+      <a:solidFill>
+        <a:srgbClr val="1C1C1C"/>
+      </a:solidFill>
+      <a:effectLst/>
+    </p:bgPr>
+  </p:bg>
   <p:cSld name="Two Content">
     <p:spTree>
       <p:nvGrpSpPr>
@@ -1420,6 +1468,14 @@
 
 <file path=ppt/slideLayouts/slideLayout5.xml><?xml version="1.0" encoding="utf-8"?>
 <p:sldLayout xmlns:a="http://schemas.openxmlformats.org/drawingml/2006/main" xmlns:r="http://schemas.openxmlformats.org/officeDocument/2006/relationships" xmlns:p="http://schemas.openxmlformats.org/presentationml/2006/main" type="twoTxTwoObj" preserve="1">
+  <p:bg>
+    <p:bgPr>
+      <a:solidFill>
+        <a:srgbClr val="1C1C1C"/>
+      </a:solidFill>
+      <a:effectLst/>
+    </p:bgPr>
+  </p:bg>
   <p:cSld name="Comparison">
     <p:spTree>
       <p:nvGrpSpPr>
@@ -1842,6 +1898,14 @@
 
 <file path=ppt/slideLayouts/slideLayout6.xml><?xml version="1.0" encoding="utf-8"?>
 <p:sldLayout xmlns:a="http://schemas.openxmlformats.org/drawingml/2006/main" xmlns:r="http://schemas.openxmlformats.org/officeDocument/2006/relationships" xmlns:p="http://schemas.openxmlformats.org/presentationml/2006/main" type="titleOnly" preserve="1">
+  <p:bg>
+    <p:bgPr>
+      <a:solidFill>
+        <a:srgbClr val="1C1C1C"/>
+      </a:solidFill>
+      <a:effectLst/>
+    </p:bgPr>
+  </p:bg>
   <p:cSld name="Title Only">
     <p:spTree>
       <p:nvGrpSpPr>
@@ -1960,6 +2024,14 @@
 
 <file path=ppt/slideLayouts/slideLayout7.xml><?xml version="1.0" encoding="utf-8"?>
 <p:sldLayout xmlns:a="http://schemas.openxmlformats.org/drawingml/2006/main" xmlns:r="http://schemas.openxmlformats.org/officeDocument/2006/relationships" xmlns:p="http://schemas.openxmlformats.org/presentationml/2006/main" type="blank" preserve="1">
+  <p:bg>
+    <p:bgPr>
+      <a:solidFill>
+        <a:srgbClr val="1C1C1C"/>
+      </a:solidFill>
+      <a:effectLst/>
+    </p:bgPr>
+  </p:bg>
   <p:cSld name="Blank">
     <p:spTree>
       <p:nvGrpSpPr>
@@ -2055,6 +2127,14 @@
 
 <file path=ppt/slideLayouts/slideLayout8.xml><?xml version="1.0" encoding="utf-8"?>
 <p:sldLayout xmlns:a="http://schemas.openxmlformats.org/drawingml/2006/main" xmlns:r="http://schemas.openxmlformats.org/officeDocument/2006/relationships" xmlns:p="http://schemas.openxmlformats.org/presentationml/2006/main" type="objTx" preserve="1">
+  <p:bg>
+    <p:bgPr>
+      <a:solidFill>
+        <a:srgbClr val="1C1C1C"/>
+      </a:solidFill>
+      <a:effectLst/>
+    </p:bgPr>
+  </p:bg>
   <p:cSld name="Content with Caption">
     <p:spTree>
       <p:nvGrpSpPr>
@@ -2332,6 +2412,14 @@
 
 <file path=ppt/slideLayouts/slideLayout9.xml><?xml version="1.0" encoding="utf-8"?>
 <p:sldLayout xmlns:a="http://schemas.openxmlformats.org/drawingml/2006/main" xmlns:r="http://schemas.openxmlformats.org/officeDocument/2006/relationships" xmlns:p="http://schemas.openxmlformats.org/presentationml/2006/main" type="picTx" preserve="1">
+  <p:bg>
+    <p:bgPr>
+      <a:solidFill>
+        <a:srgbClr val="1C1C1C"/>
+      </a:solidFill>
+      <a:effectLst/>
+    </p:bgPr>
+  </p:bg>
   <p:cSld name="Picture with Caption">
     <p:spTree>
       <p:nvGrpSpPr>
@@ -2587,9 +2675,12 @@
 <p:sldMaster xmlns:a="http://schemas.openxmlformats.org/drawingml/2006/main" xmlns:r="http://schemas.openxmlformats.org/officeDocument/2006/relationships" xmlns:p="http://schemas.openxmlformats.org/presentationml/2006/main">
   <p:cSld>
     <p:bg>
-      <p:bgRef idx="1001">
-        <a:schemeClr val="bg1"/>
-      </p:bgRef>
+      <p:bgPr>
+        <a:solidFill>
+          <a:srgbClr val="1C1C1C"/>
+        </a:solidFill>
+        <a:effectLst/>
+      </p:bgPr>
     </p:bg>
     <p:spTree>
       <p:nvGrpSpPr>
@@ -2826,7 +2917,7 @@
       </p:ext>
     </p:extLst>
   </p:cSld>
-  <p:clrMap bg1="lt1" tx1="dk1" bg2="lt2" tx2="dk2" accent1="accent1" accent2="accent2" accent3="accent3" accent4="accent4" accent5="accent5" accent6="accent6" hlink="hlink" folHlink="folHlink"/>
+  <p:clrMap bg1="dk1" tx1="dk1" bg2="lt2" tx2="dk2" accent1="accent1" accent2="accent2" accent3="accent3" accent4="accent4" accent5="accent5" accent6="accent6" hlink="hlink" folHlink="folHlink"/>
   <p:sldLayoutIdLst>
     <p:sldLayoutId id="2147483649" r:id="rId1"/>
     <p:sldLayoutId id="2147483650" r:id="rId2"/>
@@ -9209,13 +9300,13 @@
         <a:sysClr val="window" lastClr="FFFFFF"/>
       </a:lt1>
       <a:dk2>
-        <a:srgbClr val="1F497D"/>
+        <a:srgbClr val="252525"/>
       </a:dk2>
       <a:lt2>
         <a:srgbClr val="EEECE1"/>
       </a:lt2>
       <a:accent1>
-        <a:srgbClr val="4F81BD"/>
+        <a:srgbClr val="DA7756"/>
       </a:accent1>
       <a:accent2>
         <a:srgbClr val="C0504D"/>

--- a/00-01_han-ai/training-materials/course04_jissen_doga.pptx
+++ b/00-01_han-ai/training-materials/course04_jissen_doga.pptx
@@ -3202,6 +3202,35 @@
         <p:nvPr/>
       </p:nvGrpSpPr>
       <p:grpSpPr/>
+      <p:sp xmlns:a="http://schemas.openxmlformats.org/drawingml/2006/main" xmlns:p="http://schemas.openxmlformats.org/presentationml/2006/main">
+        <p:nvSpPr>
+          <p:cNvPr id="9900" name="_BG_DARK_"/>
+          <p:cNvSpPr>
+            <a:spLocks noSelect="1" noMove="1" noResize="1"/>
+          </p:cNvSpPr>
+          <p:nvPr/>
+        </p:nvSpPr>
+        <p:spPr>
+          <a:xfrm>
+            <a:off x="0" y="0"/>
+            <a:ext cx="9144000" cy="5143500"/>
+          </a:xfrm>
+          <a:prstGeom prst="rect">
+            <a:avLst/>
+          </a:prstGeom>
+          <a:solidFill>
+            <a:srgbClr val="1C1C1C"/>
+          </a:solidFill>
+          <a:ln>
+            <a:noFill/>
+          </a:ln>
+        </p:spPr>
+        <p:txBody>
+          <a:bodyPr/>
+          <a:lstStyle/>
+          <a:p/>
+        </p:txBody>
+      </p:sp>
       <p:sp>
         <p:nvSpPr>
           <p:cNvPr id="2" name="Rectangle 1"/>
@@ -3441,6 +3470,35 @@
         <p:nvPr/>
       </p:nvGrpSpPr>
       <p:grpSpPr/>
+      <p:sp xmlns:a="http://schemas.openxmlformats.org/drawingml/2006/main" xmlns:p="http://schemas.openxmlformats.org/presentationml/2006/main">
+        <p:nvSpPr>
+          <p:cNvPr id="9900" name="_BG_DARK_"/>
+          <p:cNvSpPr>
+            <a:spLocks noSelect="1" noMove="1" noResize="1"/>
+          </p:cNvSpPr>
+          <p:nvPr/>
+        </p:nvSpPr>
+        <p:spPr>
+          <a:xfrm>
+            <a:off x="0" y="0"/>
+            <a:ext cx="9144000" cy="5143500"/>
+          </a:xfrm>
+          <a:prstGeom prst="rect">
+            <a:avLst/>
+          </a:prstGeom>
+          <a:solidFill>
+            <a:srgbClr val="1C1C1C"/>
+          </a:solidFill>
+          <a:ln>
+            <a:noFill/>
+          </a:ln>
+        </p:spPr>
+        <p:txBody>
+          <a:bodyPr/>
+          <a:lstStyle/>
+          <a:p/>
+        </p:txBody>
+      </p:sp>
       <p:sp>
         <p:nvSpPr>
           <p:cNvPr id="2" name="Rectangle 1"/>
@@ -3646,6 +3704,35 @@
         <p:nvPr/>
       </p:nvGrpSpPr>
       <p:grpSpPr/>
+      <p:sp xmlns:a="http://schemas.openxmlformats.org/drawingml/2006/main" xmlns:p="http://schemas.openxmlformats.org/presentationml/2006/main">
+        <p:nvSpPr>
+          <p:cNvPr id="9900" name="_BG_DARK_"/>
+          <p:cNvSpPr>
+            <a:spLocks noSelect="1" noMove="1" noResize="1"/>
+          </p:cNvSpPr>
+          <p:nvPr/>
+        </p:nvSpPr>
+        <p:spPr>
+          <a:xfrm>
+            <a:off x="0" y="0"/>
+            <a:ext cx="9144000" cy="5143500"/>
+          </a:xfrm>
+          <a:prstGeom prst="rect">
+            <a:avLst/>
+          </a:prstGeom>
+          <a:solidFill>
+            <a:srgbClr val="1C1C1C"/>
+          </a:solidFill>
+          <a:ln>
+            <a:noFill/>
+          </a:ln>
+        </p:spPr>
+        <p:txBody>
+          <a:bodyPr/>
+          <a:lstStyle/>
+          <a:p/>
+        </p:txBody>
+      </p:sp>
       <p:sp>
         <p:nvSpPr>
           <p:cNvPr id="2" name="Rectangle 1"/>
@@ -4132,6 +4219,35 @@
         <p:nvPr/>
       </p:nvGrpSpPr>
       <p:grpSpPr/>
+      <p:sp xmlns:a="http://schemas.openxmlformats.org/drawingml/2006/main" xmlns:p="http://schemas.openxmlformats.org/presentationml/2006/main">
+        <p:nvSpPr>
+          <p:cNvPr id="9900" name="_BG_DARK_"/>
+          <p:cNvSpPr>
+            <a:spLocks noSelect="1" noMove="1" noResize="1"/>
+          </p:cNvSpPr>
+          <p:nvPr/>
+        </p:nvSpPr>
+        <p:spPr>
+          <a:xfrm>
+            <a:off x="0" y="0"/>
+            <a:ext cx="9144000" cy="5143500"/>
+          </a:xfrm>
+          <a:prstGeom prst="rect">
+            <a:avLst/>
+          </a:prstGeom>
+          <a:solidFill>
+            <a:srgbClr val="1C1C1C"/>
+          </a:solidFill>
+          <a:ln>
+            <a:noFill/>
+          </a:ln>
+        </p:spPr>
+        <p:txBody>
+          <a:bodyPr/>
+          <a:lstStyle/>
+          <a:p/>
+        </p:txBody>
+      </p:sp>
       <p:sp>
         <p:nvSpPr>
           <p:cNvPr id="2" name="TextBox 1"/>
@@ -4226,6 +4342,35 @@
         <p:nvPr/>
       </p:nvGrpSpPr>
       <p:grpSpPr/>
+      <p:sp xmlns:a="http://schemas.openxmlformats.org/drawingml/2006/main" xmlns:p="http://schemas.openxmlformats.org/presentationml/2006/main">
+        <p:nvSpPr>
+          <p:cNvPr id="9900" name="_BG_DARK_"/>
+          <p:cNvSpPr>
+            <a:spLocks noSelect="1" noMove="1" noResize="1"/>
+          </p:cNvSpPr>
+          <p:nvPr/>
+        </p:nvSpPr>
+        <p:spPr>
+          <a:xfrm>
+            <a:off x="0" y="0"/>
+            <a:ext cx="9144000" cy="5143500"/>
+          </a:xfrm>
+          <a:prstGeom prst="rect">
+            <a:avLst/>
+          </a:prstGeom>
+          <a:solidFill>
+            <a:srgbClr val="1C1C1C"/>
+          </a:solidFill>
+          <a:ln>
+            <a:noFill/>
+          </a:ln>
+        </p:spPr>
+        <p:txBody>
+          <a:bodyPr/>
+          <a:lstStyle/>
+          <a:p/>
+        </p:txBody>
+      </p:sp>
       <p:sp>
         <p:nvSpPr>
           <p:cNvPr id="2" name="Rectangle 1"/>
@@ -4431,6 +4576,35 @@
         <p:nvPr/>
       </p:nvGrpSpPr>
       <p:grpSpPr/>
+      <p:sp xmlns:a="http://schemas.openxmlformats.org/drawingml/2006/main" xmlns:p="http://schemas.openxmlformats.org/presentationml/2006/main">
+        <p:nvSpPr>
+          <p:cNvPr id="9900" name="_BG_DARK_"/>
+          <p:cNvSpPr>
+            <a:spLocks noSelect="1" noMove="1" noResize="1"/>
+          </p:cNvSpPr>
+          <p:nvPr/>
+        </p:nvSpPr>
+        <p:spPr>
+          <a:xfrm>
+            <a:off x="0" y="0"/>
+            <a:ext cx="9144000" cy="5143500"/>
+          </a:xfrm>
+          <a:prstGeom prst="rect">
+            <a:avLst/>
+          </a:prstGeom>
+          <a:solidFill>
+            <a:srgbClr val="1C1C1C"/>
+          </a:solidFill>
+          <a:ln>
+            <a:noFill/>
+          </a:ln>
+        </p:spPr>
+        <p:txBody>
+          <a:bodyPr/>
+          <a:lstStyle/>
+          <a:p/>
+        </p:txBody>
+      </p:sp>
       <p:sp>
         <p:nvSpPr>
           <p:cNvPr id="2" name="Rectangle 1"/>
@@ -5001,6 +5175,35 @@
         <p:nvPr/>
       </p:nvGrpSpPr>
       <p:grpSpPr/>
+      <p:sp xmlns:a="http://schemas.openxmlformats.org/drawingml/2006/main" xmlns:p="http://schemas.openxmlformats.org/presentationml/2006/main">
+        <p:nvSpPr>
+          <p:cNvPr id="9900" name="_BG_DARK_"/>
+          <p:cNvSpPr>
+            <a:spLocks noSelect="1" noMove="1" noResize="1"/>
+          </p:cNvSpPr>
+          <p:nvPr/>
+        </p:nvSpPr>
+        <p:spPr>
+          <a:xfrm>
+            <a:off x="0" y="0"/>
+            <a:ext cx="9144000" cy="5143500"/>
+          </a:xfrm>
+          <a:prstGeom prst="rect">
+            <a:avLst/>
+          </a:prstGeom>
+          <a:solidFill>
+            <a:srgbClr val="1C1C1C"/>
+          </a:solidFill>
+          <a:ln>
+            <a:noFill/>
+          </a:ln>
+        </p:spPr>
+        <p:txBody>
+          <a:bodyPr/>
+          <a:lstStyle/>
+          <a:p/>
+        </p:txBody>
+      </p:sp>
       <p:sp>
         <p:nvSpPr>
           <p:cNvPr id="2" name="Rectangle 1"/>
@@ -5206,6 +5409,35 @@
         <p:nvPr/>
       </p:nvGrpSpPr>
       <p:grpSpPr/>
+      <p:sp xmlns:a="http://schemas.openxmlformats.org/drawingml/2006/main" xmlns:p="http://schemas.openxmlformats.org/presentationml/2006/main">
+        <p:nvSpPr>
+          <p:cNvPr id="9900" name="_BG_DARK_"/>
+          <p:cNvSpPr>
+            <a:spLocks noSelect="1" noMove="1" noResize="1"/>
+          </p:cNvSpPr>
+          <p:nvPr/>
+        </p:nvSpPr>
+        <p:spPr>
+          <a:xfrm>
+            <a:off x="0" y="0"/>
+            <a:ext cx="9144000" cy="5143500"/>
+          </a:xfrm>
+          <a:prstGeom prst="rect">
+            <a:avLst/>
+          </a:prstGeom>
+          <a:solidFill>
+            <a:srgbClr val="1C1C1C"/>
+          </a:solidFill>
+          <a:ln>
+            <a:noFill/>
+          </a:ln>
+        </p:spPr>
+        <p:txBody>
+          <a:bodyPr/>
+          <a:lstStyle/>
+          <a:p/>
+        </p:txBody>
+      </p:sp>
       <p:sp>
         <p:nvSpPr>
           <p:cNvPr id="2" name="Rectangle 1"/>
@@ -5701,6 +5933,35 @@
         <p:nvPr/>
       </p:nvGrpSpPr>
       <p:grpSpPr/>
+      <p:sp xmlns:a="http://schemas.openxmlformats.org/drawingml/2006/main" xmlns:p="http://schemas.openxmlformats.org/presentationml/2006/main">
+        <p:nvSpPr>
+          <p:cNvPr id="9900" name="_BG_DARK_"/>
+          <p:cNvSpPr>
+            <a:spLocks noSelect="1" noMove="1" noResize="1"/>
+          </p:cNvSpPr>
+          <p:nvPr/>
+        </p:nvSpPr>
+        <p:spPr>
+          <a:xfrm>
+            <a:off x="0" y="0"/>
+            <a:ext cx="9144000" cy="5143500"/>
+          </a:xfrm>
+          <a:prstGeom prst="rect">
+            <a:avLst/>
+          </a:prstGeom>
+          <a:solidFill>
+            <a:srgbClr val="1C1C1C"/>
+          </a:solidFill>
+          <a:ln>
+            <a:noFill/>
+          </a:ln>
+        </p:spPr>
+        <p:txBody>
+          <a:bodyPr/>
+          <a:lstStyle/>
+          <a:p/>
+        </p:txBody>
+      </p:sp>
       <p:sp>
         <p:nvSpPr>
           <p:cNvPr id="2" name="Rectangle 1"/>
@@ -6486,6 +6747,35 @@
         <p:nvPr/>
       </p:nvGrpSpPr>
       <p:grpSpPr/>
+      <p:sp xmlns:a="http://schemas.openxmlformats.org/drawingml/2006/main" xmlns:p="http://schemas.openxmlformats.org/presentationml/2006/main">
+        <p:nvSpPr>
+          <p:cNvPr id="9900" name="_BG_DARK_"/>
+          <p:cNvSpPr>
+            <a:spLocks noSelect="1" noMove="1" noResize="1"/>
+          </p:cNvSpPr>
+          <p:nvPr/>
+        </p:nvSpPr>
+        <p:spPr>
+          <a:xfrm>
+            <a:off x="0" y="0"/>
+            <a:ext cx="9144000" cy="5143500"/>
+          </a:xfrm>
+          <a:prstGeom prst="rect">
+            <a:avLst/>
+          </a:prstGeom>
+          <a:solidFill>
+            <a:srgbClr val="1C1C1C"/>
+          </a:solidFill>
+          <a:ln>
+            <a:noFill/>
+          </a:ln>
+        </p:spPr>
+        <p:txBody>
+          <a:bodyPr/>
+          <a:lstStyle/>
+          <a:p/>
+        </p:txBody>
+      </p:sp>
       <p:sp>
         <p:nvSpPr>
           <p:cNvPr id="2" name="Rectangle 1"/>
@@ -7019,6 +7309,35 @@
         <p:nvPr/>
       </p:nvGrpSpPr>
       <p:grpSpPr/>
+      <p:sp xmlns:a="http://schemas.openxmlformats.org/drawingml/2006/main" xmlns:p="http://schemas.openxmlformats.org/presentationml/2006/main">
+        <p:nvSpPr>
+          <p:cNvPr id="9900" name="_BG_DARK_"/>
+          <p:cNvSpPr>
+            <a:spLocks noSelect="1" noMove="1" noResize="1"/>
+          </p:cNvSpPr>
+          <p:nvPr/>
+        </p:nvSpPr>
+        <p:spPr>
+          <a:xfrm>
+            <a:off x="0" y="0"/>
+            <a:ext cx="9144000" cy="5143500"/>
+          </a:xfrm>
+          <a:prstGeom prst="rect">
+            <a:avLst/>
+          </a:prstGeom>
+          <a:solidFill>
+            <a:srgbClr val="1C1C1C"/>
+          </a:solidFill>
+          <a:ln>
+            <a:noFill/>
+          </a:ln>
+        </p:spPr>
+        <p:txBody>
+          <a:bodyPr/>
+          <a:lstStyle/>
+          <a:p/>
+        </p:txBody>
+      </p:sp>
       <p:sp>
         <p:nvSpPr>
           <p:cNvPr id="2" name="Rectangle 1"/>
@@ -7224,6 +7543,35 @@
         <p:nvPr/>
       </p:nvGrpSpPr>
       <p:grpSpPr/>
+      <p:sp xmlns:a="http://schemas.openxmlformats.org/drawingml/2006/main" xmlns:p="http://schemas.openxmlformats.org/presentationml/2006/main">
+        <p:nvSpPr>
+          <p:cNvPr id="9900" name="_BG_DARK_"/>
+          <p:cNvSpPr>
+            <a:spLocks noSelect="1" noMove="1" noResize="1"/>
+          </p:cNvSpPr>
+          <p:nvPr/>
+        </p:nvSpPr>
+        <p:spPr>
+          <a:xfrm>
+            <a:off x="0" y="0"/>
+            <a:ext cx="9144000" cy="5143500"/>
+          </a:xfrm>
+          <a:prstGeom prst="rect">
+            <a:avLst/>
+          </a:prstGeom>
+          <a:solidFill>
+            <a:srgbClr val="1C1C1C"/>
+          </a:solidFill>
+          <a:ln>
+            <a:noFill/>
+          </a:ln>
+        </p:spPr>
+        <p:txBody>
+          <a:bodyPr/>
+          <a:lstStyle/>
+          <a:p/>
+        </p:txBody>
+      </p:sp>
       <p:sp>
         <p:nvSpPr>
           <p:cNvPr id="2" name="Rectangle 1"/>
@@ -7714,6 +8062,35 @@
         <p:nvPr/>
       </p:nvGrpSpPr>
       <p:grpSpPr/>
+      <p:sp xmlns:a="http://schemas.openxmlformats.org/drawingml/2006/main" xmlns:p="http://schemas.openxmlformats.org/presentationml/2006/main">
+        <p:nvSpPr>
+          <p:cNvPr id="9900" name="_BG_DARK_"/>
+          <p:cNvSpPr>
+            <a:spLocks noSelect="1" noMove="1" noResize="1"/>
+          </p:cNvSpPr>
+          <p:nvPr/>
+        </p:nvSpPr>
+        <p:spPr>
+          <a:xfrm>
+            <a:off x="0" y="0"/>
+            <a:ext cx="9144000" cy="5143500"/>
+          </a:xfrm>
+          <a:prstGeom prst="rect">
+            <a:avLst/>
+          </a:prstGeom>
+          <a:solidFill>
+            <a:srgbClr val="1C1C1C"/>
+          </a:solidFill>
+          <a:ln>
+            <a:noFill/>
+          </a:ln>
+        </p:spPr>
+        <p:txBody>
+          <a:bodyPr/>
+          <a:lstStyle/>
+          <a:p/>
+        </p:txBody>
+      </p:sp>
       <p:sp>
         <p:nvSpPr>
           <p:cNvPr id="2" name="Rectangle 1"/>
@@ -7919,6 +8296,35 @@
         <p:nvPr/>
       </p:nvGrpSpPr>
       <p:grpSpPr/>
+      <p:sp xmlns:a="http://schemas.openxmlformats.org/drawingml/2006/main" xmlns:p="http://schemas.openxmlformats.org/presentationml/2006/main">
+        <p:nvSpPr>
+          <p:cNvPr id="9900" name="_BG_DARK_"/>
+          <p:cNvSpPr>
+            <a:spLocks noSelect="1" noMove="1" noResize="1"/>
+          </p:cNvSpPr>
+          <p:nvPr/>
+        </p:nvSpPr>
+        <p:spPr>
+          <a:xfrm>
+            <a:off x="0" y="0"/>
+            <a:ext cx="9144000" cy="5143500"/>
+          </a:xfrm>
+          <a:prstGeom prst="rect">
+            <a:avLst/>
+          </a:prstGeom>
+          <a:solidFill>
+            <a:srgbClr val="1C1C1C"/>
+          </a:solidFill>
+          <a:ln>
+            <a:noFill/>
+          </a:ln>
+        </p:spPr>
+        <p:txBody>
+          <a:bodyPr/>
+          <a:lstStyle/>
+          <a:p/>
+        </p:txBody>
+      </p:sp>
       <p:sp>
         <p:nvSpPr>
           <p:cNvPr id="2" name="Rectangle 1"/>
@@ -8491,6 +8897,35 @@
         <p:nvPr/>
       </p:nvGrpSpPr>
       <p:grpSpPr/>
+      <p:sp xmlns:a="http://schemas.openxmlformats.org/drawingml/2006/main" xmlns:p="http://schemas.openxmlformats.org/presentationml/2006/main">
+        <p:nvSpPr>
+          <p:cNvPr id="9900" name="_BG_DARK_"/>
+          <p:cNvSpPr>
+            <a:spLocks noSelect="1" noMove="1" noResize="1"/>
+          </p:cNvSpPr>
+          <p:nvPr/>
+        </p:nvSpPr>
+        <p:spPr>
+          <a:xfrm>
+            <a:off x="0" y="0"/>
+            <a:ext cx="9144000" cy="5143500"/>
+          </a:xfrm>
+          <a:prstGeom prst="rect">
+            <a:avLst/>
+          </a:prstGeom>
+          <a:solidFill>
+            <a:srgbClr val="1C1C1C"/>
+          </a:solidFill>
+          <a:ln>
+            <a:noFill/>
+          </a:ln>
+        </p:spPr>
+        <p:txBody>
+          <a:bodyPr/>
+          <a:lstStyle/>
+          <a:p/>
+        </p:txBody>
+      </p:sp>
       <p:sp>
         <p:nvSpPr>
           <p:cNvPr id="2" name="Rectangle 1"/>
@@ -8696,6 +9131,35 @@
         <p:nvPr/>
       </p:nvGrpSpPr>
       <p:grpSpPr/>
+      <p:sp xmlns:a="http://schemas.openxmlformats.org/drawingml/2006/main" xmlns:p="http://schemas.openxmlformats.org/presentationml/2006/main">
+        <p:nvSpPr>
+          <p:cNvPr id="9900" name="_BG_DARK_"/>
+          <p:cNvSpPr>
+            <a:spLocks noSelect="1" noMove="1" noResize="1"/>
+          </p:cNvSpPr>
+          <p:nvPr/>
+        </p:nvSpPr>
+        <p:spPr>
+          <a:xfrm>
+            <a:off x="0" y="0"/>
+            <a:ext cx="9144000" cy="5143500"/>
+          </a:xfrm>
+          <a:prstGeom prst="rect">
+            <a:avLst/>
+          </a:prstGeom>
+          <a:solidFill>
+            <a:srgbClr val="1C1C1C"/>
+          </a:solidFill>
+          <a:ln>
+            <a:noFill/>
+          </a:ln>
+        </p:spPr>
+        <p:txBody>
+          <a:bodyPr/>
+          <a:lstStyle/>
+          <a:p/>
+        </p:txBody>
+      </p:sp>
       <p:sp>
         <p:nvSpPr>
           <p:cNvPr id="2" name="Rectangle 1"/>

--- a/00-01_han-ai/training-materials/course04_jissen_doga.pptx
+++ b/00-01_han-ai/training-materials/course04_jissen_doga.pptx
@@ -3202,12 +3202,10 @@
         <p:nvPr/>
       </p:nvGrpSpPr>
       <p:grpSpPr/>
-      <p:sp xmlns:a="http://schemas.openxmlformats.org/drawingml/2006/main" xmlns:p="http://schemas.openxmlformats.org/presentationml/2006/main">
+      <p:sp>
         <p:nvSpPr>
           <p:cNvPr id="9900" name="_BG_DARK_"/>
-          <p:cNvSpPr>
-            <a:spLocks noSelect="1" noMove="1" noResize="1"/>
-          </p:cNvSpPr>
+          <p:cNvSpPr/>
           <p:nvPr/>
         </p:nvSpPr>
         <p:spPr>
@@ -3225,6 +3223,20 @@
             <a:noFill/>
           </a:ln>
         </p:spPr>
+        <p:style>
+          <a:lnRef idx="1">
+            <a:srgbClr val="1C1C1C"/>
+          </a:lnRef>
+          <a:fillRef idx="1">
+            <a:srgbClr val="1C1C1C"/>
+          </a:fillRef>
+          <a:effectRef idx="0">
+            <a:srgbClr val="1C1C1C"/>
+          </a:effectRef>
+          <a:fontRef idx="minor">
+            <a:srgbClr val="EEEEEE"/>
+          </a:fontRef>
+        </p:style>
         <p:txBody>
           <a:bodyPr/>
           <a:lstStyle/>
@@ -3470,12 +3482,10 @@
         <p:nvPr/>
       </p:nvGrpSpPr>
       <p:grpSpPr/>
-      <p:sp xmlns:a="http://schemas.openxmlformats.org/drawingml/2006/main" xmlns:p="http://schemas.openxmlformats.org/presentationml/2006/main">
+      <p:sp>
         <p:nvSpPr>
           <p:cNvPr id="9900" name="_BG_DARK_"/>
-          <p:cNvSpPr>
-            <a:spLocks noSelect="1" noMove="1" noResize="1"/>
-          </p:cNvSpPr>
+          <p:cNvSpPr/>
           <p:nvPr/>
         </p:nvSpPr>
         <p:spPr>
@@ -3493,6 +3503,20 @@
             <a:noFill/>
           </a:ln>
         </p:spPr>
+        <p:style>
+          <a:lnRef idx="1">
+            <a:srgbClr val="1C1C1C"/>
+          </a:lnRef>
+          <a:fillRef idx="1">
+            <a:srgbClr val="1C1C1C"/>
+          </a:fillRef>
+          <a:effectRef idx="0">
+            <a:srgbClr val="1C1C1C"/>
+          </a:effectRef>
+          <a:fontRef idx="minor">
+            <a:srgbClr val="EEEEEE"/>
+          </a:fontRef>
+        </p:style>
         <p:txBody>
           <a:bodyPr/>
           <a:lstStyle/>
@@ -3704,12 +3728,10 @@
         <p:nvPr/>
       </p:nvGrpSpPr>
       <p:grpSpPr/>
-      <p:sp xmlns:a="http://schemas.openxmlformats.org/drawingml/2006/main" xmlns:p="http://schemas.openxmlformats.org/presentationml/2006/main">
+      <p:sp>
         <p:nvSpPr>
           <p:cNvPr id="9900" name="_BG_DARK_"/>
-          <p:cNvSpPr>
-            <a:spLocks noSelect="1" noMove="1" noResize="1"/>
-          </p:cNvSpPr>
+          <p:cNvSpPr/>
           <p:nvPr/>
         </p:nvSpPr>
         <p:spPr>
@@ -3727,6 +3749,20 @@
             <a:noFill/>
           </a:ln>
         </p:spPr>
+        <p:style>
+          <a:lnRef idx="1">
+            <a:srgbClr val="1C1C1C"/>
+          </a:lnRef>
+          <a:fillRef idx="1">
+            <a:srgbClr val="1C1C1C"/>
+          </a:fillRef>
+          <a:effectRef idx="0">
+            <a:srgbClr val="1C1C1C"/>
+          </a:effectRef>
+          <a:fontRef idx="minor">
+            <a:srgbClr val="EEEEEE"/>
+          </a:fontRef>
+        </p:style>
         <p:txBody>
           <a:bodyPr/>
           <a:lstStyle/>
@@ -4219,12 +4255,10 @@
         <p:nvPr/>
       </p:nvGrpSpPr>
       <p:grpSpPr/>
-      <p:sp xmlns:a="http://schemas.openxmlformats.org/drawingml/2006/main" xmlns:p="http://schemas.openxmlformats.org/presentationml/2006/main">
+      <p:sp>
         <p:nvSpPr>
           <p:cNvPr id="9900" name="_BG_DARK_"/>
-          <p:cNvSpPr>
-            <a:spLocks noSelect="1" noMove="1" noResize="1"/>
-          </p:cNvSpPr>
+          <p:cNvSpPr/>
           <p:nvPr/>
         </p:nvSpPr>
         <p:spPr>
@@ -4242,6 +4276,20 @@
             <a:noFill/>
           </a:ln>
         </p:spPr>
+        <p:style>
+          <a:lnRef idx="1">
+            <a:srgbClr val="1C1C1C"/>
+          </a:lnRef>
+          <a:fillRef idx="1">
+            <a:srgbClr val="1C1C1C"/>
+          </a:fillRef>
+          <a:effectRef idx="0">
+            <a:srgbClr val="1C1C1C"/>
+          </a:effectRef>
+          <a:fontRef idx="minor">
+            <a:srgbClr val="EEEEEE"/>
+          </a:fontRef>
+        </p:style>
         <p:txBody>
           <a:bodyPr/>
           <a:lstStyle/>
@@ -4342,12 +4390,10 @@
         <p:nvPr/>
       </p:nvGrpSpPr>
       <p:grpSpPr/>
-      <p:sp xmlns:a="http://schemas.openxmlformats.org/drawingml/2006/main" xmlns:p="http://schemas.openxmlformats.org/presentationml/2006/main">
+      <p:sp>
         <p:nvSpPr>
           <p:cNvPr id="9900" name="_BG_DARK_"/>
-          <p:cNvSpPr>
-            <a:spLocks noSelect="1" noMove="1" noResize="1"/>
-          </p:cNvSpPr>
+          <p:cNvSpPr/>
           <p:nvPr/>
         </p:nvSpPr>
         <p:spPr>
@@ -4365,6 +4411,20 @@
             <a:noFill/>
           </a:ln>
         </p:spPr>
+        <p:style>
+          <a:lnRef idx="1">
+            <a:srgbClr val="1C1C1C"/>
+          </a:lnRef>
+          <a:fillRef idx="1">
+            <a:srgbClr val="1C1C1C"/>
+          </a:fillRef>
+          <a:effectRef idx="0">
+            <a:srgbClr val="1C1C1C"/>
+          </a:effectRef>
+          <a:fontRef idx="minor">
+            <a:srgbClr val="EEEEEE"/>
+          </a:fontRef>
+        </p:style>
         <p:txBody>
           <a:bodyPr/>
           <a:lstStyle/>
@@ -4576,12 +4636,10 @@
         <p:nvPr/>
       </p:nvGrpSpPr>
       <p:grpSpPr/>
-      <p:sp xmlns:a="http://schemas.openxmlformats.org/drawingml/2006/main" xmlns:p="http://schemas.openxmlformats.org/presentationml/2006/main">
+      <p:sp>
         <p:nvSpPr>
           <p:cNvPr id="9900" name="_BG_DARK_"/>
-          <p:cNvSpPr>
-            <a:spLocks noSelect="1" noMove="1" noResize="1"/>
-          </p:cNvSpPr>
+          <p:cNvSpPr/>
           <p:nvPr/>
         </p:nvSpPr>
         <p:spPr>
@@ -4599,6 +4657,20 @@
             <a:noFill/>
           </a:ln>
         </p:spPr>
+        <p:style>
+          <a:lnRef idx="1">
+            <a:srgbClr val="1C1C1C"/>
+          </a:lnRef>
+          <a:fillRef idx="1">
+            <a:srgbClr val="1C1C1C"/>
+          </a:fillRef>
+          <a:effectRef idx="0">
+            <a:srgbClr val="1C1C1C"/>
+          </a:effectRef>
+          <a:fontRef idx="minor">
+            <a:srgbClr val="EEEEEE"/>
+          </a:fontRef>
+        </p:style>
         <p:txBody>
           <a:bodyPr/>
           <a:lstStyle/>
@@ -5175,12 +5247,10 @@
         <p:nvPr/>
       </p:nvGrpSpPr>
       <p:grpSpPr/>
-      <p:sp xmlns:a="http://schemas.openxmlformats.org/drawingml/2006/main" xmlns:p="http://schemas.openxmlformats.org/presentationml/2006/main">
+      <p:sp>
         <p:nvSpPr>
           <p:cNvPr id="9900" name="_BG_DARK_"/>
-          <p:cNvSpPr>
-            <a:spLocks noSelect="1" noMove="1" noResize="1"/>
-          </p:cNvSpPr>
+          <p:cNvSpPr/>
           <p:nvPr/>
         </p:nvSpPr>
         <p:spPr>
@@ -5198,6 +5268,20 @@
             <a:noFill/>
           </a:ln>
         </p:spPr>
+        <p:style>
+          <a:lnRef idx="1">
+            <a:srgbClr val="1C1C1C"/>
+          </a:lnRef>
+          <a:fillRef idx="1">
+            <a:srgbClr val="1C1C1C"/>
+          </a:fillRef>
+          <a:effectRef idx="0">
+            <a:srgbClr val="1C1C1C"/>
+          </a:effectRef>
+          <a:fontRef idx="minor">
+            <a:srgbClr val="EEEEEE"/>
+          </a:fontRef>
+        </p:style>
         <p:txBody>
           <a:bodyPr/>
           <a:lstStyle/>
@@ -5409,12 +5493,10 @@
         <p:nvPr/>
       </p:nvGrpSpPr>
       <p:grpSpPr/>
-      <p:sp xmlns:a="http://schemas.openxmlformats.org/drawingml/2006/main" xmlns:p="http://schemas.openxmlformats.org/presentationml/2006/main">
+      <p:sp>
         <p:nvSpPr>
           <p:cNvPr id="9900" name="_BG_DARK_"/>
-          <p:cNvSpPr>
-            <a:spLocks noSelect="1" noMove="1" noResize="1"/>
-          </p:cNvSpPr>
+          <p:cNvSpPr/>
           <p:nvPr/>
         </p:nvSpPr>
         <p:spPr>
@@ -5432,6 +5514,20 @@
             <a:noFill/>
           </a:ln>
         </p:spPr>
+        <p:style>
+          <a:lnRef idx="1">
+            <a:srgbClr val="1C1C1C"/>
+          </a:lnRef>
+          <a:fillRef idx="1">
+            <a:srgbClr val="1C1C1C"/>
+          </a:fillRef>
+          <a:effectRef idx="0">
+            <a:srgbClr val="1C1C1C"/>
+          </a:effectRef>
+          <a:fontRef idx="minor">
+            <a:srgbClr val="EEEEEE"/>
+          </a:fontRef>
+        </p:style>
         <p:txBody>
           <a:bodyPr/>
           <a:lstStyle/>
@@ -5933,12 +6029,10 @@
         <p:nvPr/>
       </p:nvGrpSpPr>
       <p:grpSpPr/>
-      <p:sp xmlns:a="http://schemas.openxmlformats.org/drawingml/2006/main" xmlns:p="http://schemas.openxmlformats.org/presentationml/2006/main">
+      <p:sp>
         <p:nvSpPr>
           <p:cNvPr id="9900" name="_BG_DARK_"/>
-          <p:cNvSpPr>
-            <a:spLocks noSelect="1" noMove="1" noResize="1"/>
-          </p:cNvSpPr>
+          <p:cNvSpPr/>
           <p:nvPr/>
         </p:nvSpPr>
         <p:spPr>
@@ -5956,6 +6050,20 @@
             <a:noFill/>
           </a:ln>
         </p:spPr>
+        <p:style>
+          <a:lnRef idx="1">
+            <a:srgbClr val="1C1C1C"/>
+          </a:lnRef>
+          <a:fillRef idx="1">
+            <a:srgbClr val="1C1C1C"/>
+          </a:fillRef>
+          <a:effectRef idx="0">
+            <a:srgbClr val="1C1C1C"/>
+          </a:effectRef>
+          <a:fontRef idx="minor">
+            <a:srgbClr val="EEEEEE"/>
+          </a:fontRef>
+        </p:style>
         <p:txBody>
           <a:bodyPr/>
           <a:lstStyle/>
@@ -6747,12 +6855,10 @@
         <p:nvPr/>
       </p:nvGrpSpPr>
       <p:grpSpPr/>
-      <p:sp xmlns:a="http://schemas.openxmlformats.org/drawingml/2006/main" xmlns:p="http://schemas.openxmlformats.org/presentationml/2006/main">
+      <p:sp>
         <p:nvSpPr>
           <p:cNvPr id="9900" name="_BG_DARK_"/>
-          <p:cNvSpPr>
-            <a:spLocks noSelect="1" noMove="1" noResize="1"/>
-          </p:cNvSpPr>
+          <p:cNvSpPr/>
           <p:nvPr/>
         </p:nvSpPr>
         <p:spPr>
@@ -6770,6 +6876,20 @@
             <a:noFill/>
           </a:ln>
         </p:spPr>
+        <p:style>
+          <a:lnRef idx="1">
+            <a:srgbClr val="1C1C1C"/>
+          </a:lnRef>
+          <a:fillRef idx="1">
+            <a:srgbClr val="1C1C1C"/>
+          </a:fillRef>
+          <a:effectRef idx="0">
+            <a:srgbClr val="1C1C1C"/>
+          </a:effectRef>
+          <a:fontRef idx="minor">
+            <a:srgbClr val="EEEEEE"/>
+          </a:fontRef>
+        </p:style>
         <p:txBody>
           <a:bodyPr/>
           <a:lstStyle/>
@@ -7309,12 +7429,10 @@
         <p:nvPr/>
       </p:nvGrpSpPr>
       <p:grpSpPr/>
-      <p:sp xmlns:a="http://schemas.openxmlformats.org/drawingml/2006/main" xmlns:p="http://schemas.openxmlformats.org/presentationml/2006/main">
+      <p:sp>
         <p:nvSpPr>
           <p:cNvPr id="9900" name="_BG_DARK_"/>
-          <p:cNvSpPr>
-            <a:spLocks noSelect="1" noMove="1" noResize="1"/>
-          </p:cNvSpPr>
+          <p:cNvSpPr/>
           <p:nvPr/>
         </p:nvSpPr>
         <p:spPr>
@@ -7332,6 +7450,20 @@
             <a:noFill/>
           </a:ln>
         </p:spPr>
+        <p:style>
+          <a:lnRef idx="1">
+            <a:srgbClr val="1C1C1C"/>
+          </a:lnRef>
+          <a:fillRef idx="1">
+            <a:srgbClr val="1C1C1C"/>
+          </a:fillRef>
+          <a:effectRef idx="0">
+            <a:srgbClr val="1C1C1C"/>
+          </a:effectRef>
+          <a:fontRef idx="minor">
+            <a:srgbClr val="EEEEEE"/>
+          </a:fontRef>
+        </p:style>
         <p:txBody>
           <a:bodyPr/>
           <a:lstStyle/>
@@ -7543,12 +7675,10 @@
         <p:nvPr/>
       </p:nvGrpSpPr>
       <p:grpSpPr/>
-      <p:sp xmlns:a="http://schemas.openxmlformats.org/drawingml/2006/main" xmlns:p="http://schemas.openxmlformats.org/presentationml/2006/main">
+      <p:sp>
         <p:nvSpPr>
           <p:cNvPr id="9900" name="_BG_DARK_"/>
-          <p:cNvSpPr>
-            <a:spLocks noSelect="1" noMove="1" noResize="1"/>
-          </p:cNvSpPr>
+          <p:cNvSpPr/>
           <p:nvPr/>
         </p:nvSpPr>
         <p:spPr>
@@ -7566,6 +7696,20 @@
             <a:noFill/>
           </a:ln>
         </p:spPr>
+        <p:style>
+          <a:lnRef idx="1">
+            <a:srgbClr val="1C1C1C"/>
+          </a:lnRef>
+          <a:fillRef idx="1">
+            <a:srgbClr val="1C1C1C"/>
+          </a:fillRef>
+          <a:effectRef idx="0">
+            <a:srgbClr val="1C1C1C"/>
+          </a:effectRef>
+          <a:fontRef idx="minor">
+            <a:srgbClr val="EEEEEE"/>
+          </a:fontRef>
+        </p:style>
         <p:txBody>
           <a:bodyPr/>
           <a:lstStyle/>
@@ -8062,12 +8206,10 @@
         <p:nvPr/>
       </p:nvGrpSpPr>
       <p:grpSpPr/>
-      <p:sp xmlns:a="http://schemas.openxmlformats.org/drawingml/2006/main" xmlns:p="http://schemas.openxmlformats.org/presentationml/2006/main">
+      <p:sp>
         <p:nvSpPr>
           <p:cNvPr id="9900" name="_BG_DARK_"/>
-          <p:cNvSpPr>
-            <a:spLocks noSelect="1" noMove="1" noResize="1"/>
-          </p:cNvSpPr>
+          <p:cNvSpPr/>
           <p:nvPr/>
         </p:nvSpPr>
         <p:spPr>
@@ -8085,6 +8227,20 @@
             <a:noFill/>
           </a:ln>
         </p:spPr>
+        <p:style>
+          <a:lnRef idx="1">
+            <a:srgbClr val="1C1C1C"/>
+          </a:lnRef>
+          <a:fillRef idx="1">
+            <a:srgbClr val="1C1C1C"/>
+          </a:fillRef>
+          <a:effectRef idx="0">
+            <a:srgbClr val="1C1C1C"/>
+          </a:effectRef>
+          <a:fontRef idx="minor">
+            <a:srgbClr val="EEEEEE"/>
+          </a:fontRef>
+        </p:style>
         <p:txBody>
           <a:bodyPr/>
           <a:lstStyle/>
@@ -8296,12 +8452,10 @@
         <p:nvPr/>
       </p:nvGrpSpPr>
       <p:grpSpPr/>
-      <p:sp xmlns:a="http://schemas.openxmlformats.org/drawingml/2006/main" xmlns:p="http://schemas.openxmlformats.org/presentationml/2006/main">
+      <p:sp>
         <p:nvSpPr>
           <p:cNvPr id="9900" name="_BG_DARK_"/>
-          <p:cNvSpPr>
-            <a:spLocks noSelect="1" noMove="1" noResize="1"/>
-          </p:cNvSpPr>
+          <p:cNvSpPr/>
           <p:nvPr/>
         </p:nvSpPr>
         <p:spPr>
@@ -8319,6 +8473,20 @@
             <a:noFill/>
           </a:ln>
         </p:spPr>
+        <p:style>
+          <a:lnRef idx="1">
+            <a:srgbClr val="1C1C1C"/>
+          </a:lnRef>
+          <a:fillRef idx="1">
+            <a:srgbClr val="1C1C1C"/>
+          </a:fillRef>
+          <a:effectRef idx="0">
+            <a:srgbClr val="1C1C1C"/>
+          </a:effectRef>
+          <a:fontRef idx="minor">
+            <a:srgbClr val="EEEEEE"/>
+          </a:fontRef>
+        </p:style>
         <p:txBody>
           <a:bodyPr/>
           <a:lstStyle/>
@@ -8897,12 +9065,10 @@
         <p:nvPr/>
       </p:nvGrpSpPr>
       <p:grpSpPr/>
-      <p:sp xmlns:a="http://schemas.openxmlformats.org/drawingml/2006/main" xmlns:p="http://schemas.openxmlformats.org/presentationml/2006/main">
+      <p:sp>
         <p:nvSpPr>
           <p:cNvPr id="9900" name="_BG_DARK_"/>
-          <p:cNvSpPr>
-            <a:spLocks noSelect="1" noMove="1" noResize="1"/>
-          </p:cNvSpPr>
+          <p:cNvSpPr/>
           <p:nvPr/>
         </p:nvSpPr>
         <p:spPr>
@@ -8920,6 +9086,20 @@
             <a:noFill/>
           </a:ln>
         </p:spPr>
+        <p:style>
+          <a:lnRef idx="1">
+            <a:srgbClr val="1C1C1C"/>
+          </a:lnRef>
+          <a:fillRef idx="1">
+            <a:srgbClr val="1C1C1C"/>
+          </a:fillRef>
+          <a:effectRef idx="0">
+            <a:srgbClr val="1C1C1C"/>
+          </a:effectRef>
+          <a:fontRef idx="minor">
+            <a:srgbClr val="EEEEEE"/>
+          </a:fontRef>
+        </p:style>
         <p:txBody>
           <a:bodyPr/>
           <a:lstStyle/>
@@ -9131,12 +9311,10 @@
         <p:nvPr/>
       </p:nvGrpSpPr>
       <p:grpSpPr/>
-      <p:sp xmlns:a="http://schemas.openxmlformats.org/drawingml/2006/main" xmlns:p="http://schemas.openxmlformats.org/presentationml/2006/main">
+      <p:sp>
         <p:nvSpPr>
           <p:cNvPr id="9900" name="_BG_DARK_"/>
-          <p:cNvSpPr>
-            <a:spLocks noSelect="1" noMove="1" noResize="1"/>
-          </p:cNvSpPr>
+          <p:cNvSpPr/>
           <p:nvPr/>
         </p:nvSpPr>
         <p:spPr>
@@ -9154,6 +9332,20 @@
             <a:noFill/>
           </a:ln>
         </p:spPr>
+        <p:style>
+          <a:lnRef idx="1">
+            <a:srgbClr val="1C1C1C"/>
+          </a:lnRef>
+          <a:fillRef idx="1">
+            <a:srgbClr val="1C1C1C"/>
+          </a:fillRef>
+          <a:effectRef idx="0">
+            <a:srgbClr val="1C1C1C"/>
+          </a:effectRef>
+          <a:fontRef idx="minor">
+            <a:srgbClr val="EEEEEE"/>
+          </a:fontRef>
+        </p:style>
         <p:txBody>
           <a:bodyPr/>
           <a:lstStyle/>

--- a/00-01_han-ai/training-materials/course04_jissen_doga.pptx
+++ b/00-01_han-ai/training-materials/course04_jissen_doga.pptx
@@ -6326,7 +6326,7 @@
                             <a:srgbClr val="EEEEEE"/>
                           </a:solidFill>
                         </a:rPr>
-                        <a:t>10分</a:t>
+                        <a:t>7分</a:t>
                       </a:r>
                     </a:p>
                   </a:txBody>

--- a/00-01_han-ai/training-materials/course04_jissen_doga.pptx
+++ b/00-01_han-ai/training-materials/course04_jissen_doga.pptx
@@ -4926,7 +4926,7 @@
                             <a:srgbClr val="EEEEEE"/>
                           </a:solidFill>
                         </a:rPr>
-                        <a:t>〜15分</a:t>
+                        <a:t>〜10分</a:t>
                       </a:r>
                     </a:p>
                   </a:txBody>
@@ -4990,7 +4990,7 @@
                             <a:srgbClr val="EEEEEE"/>
                           </a:solidFill>
                         </a:rPr>
-                        <a:t>〜25分</a:t>
+                        <a:t>〜30分</a:t>
                       </a:r>
                     </a:p>
                   </a:txBody>
@@ -8175,7 +8175,7 @@
                   <a:srgbClr val="DA7756"/>
                 </a:solidFill>
               </a:rPr>
-              <a:t>Seedanceはクレジット制です。本日は1人あたり○回を上限にしてください（講師より案内）</a:t>
+              <a:t>Seedanceはクレジット制です。本日は1人あたり2〜3回を目安にしてください（講師より案内）</a:t>
             </a:r>
           </a:p>
         </p:txBody>
